--- a/מצגת מעודכנת TCL.pptx
+++ b/מצגת מעודכנת TCL.pptx
@@ -12101,7 +12101,7 @@
     <p:sldLayoutId id="2147483658" r:id="rId10"/>
     <p:sldLayoutId id="2147483659" r:id="rId11"/>
   </p:sldLayoutIdLst>
-  <p:hf sldNum="0" hdr="0" ftr="0" dt="0"/>
+  <p:hf hdr="0" ftr="0" dt="0"/>
   <p:txStyles>
     <p:titleStyle>
       <a:defPPr marR="0" lvl="0" algn="l" rtl="0">
@@ -13158,6 +13158,49 @@
           </a:p>
         </p:txBody>
       </p:sp>
+      <p:sp>
+        <p:nvSpPr>
+          <p:cNvPr id="3" name="מציין מיקום של מספר שקופית 2">
+            <a:extLst>
+              <a:ext uri="{FF2B5EF4-FFF2-40B4-BE49-F238E27FC236}">
+                <a16:creationId xmlns:a16="http://schemas.microsoft.com/office/drawing/2014/main" id="{8074A3BF-64CC-440D-26DB-A5C7C5E2D9CD}"/>
+              </a:ext>
+            </a:extLst>
+          </p:cNvPr>
+          <p:cNvSpPr>
+            <a:spLocks noGrp="1"/>
+          </p:cNvSpPr>
+          <p:nvPr>
+            <p:ph type="sldNum" idx="12"/>
+          </p:nvPr>
+        </p:nvSpPr>
+        <p:spPr>
+          <a:xfrm>
+            <a:off x="9898441" y="6356350"/>
+            <a:ext cx="2133600" cy="365125"/>
+          </a:xfrm>
+        </p:spPr>
+        <p:txBody>
+          <a:bodyPr/>
+          <a:lstStyle/>
+          <a:p>
+            <a:pPr marL="0" lvl="0" indent="0" algn="r" rtl="0">
+              <a:spcBef>
+                <a:spcPts val="0"/>
+              </a:spcBef>
+              <a:spcAft>
+                <a:spcPts val="0"/>
+              </a:spcAft>
+              <a:buNone/>
+            </a:pPr>
+            <a:fld id="{00000000-1234-1234-1234-123412341234}" type="slidenum">
+              <a:rPr lang="en-US" smtClean="0"/>
+              <a:t>1</a:t>
+            </a:fld>
+            <a:endParaRPr lang="en-US" dirty="0"/>
+          </a:p>
+        </p:txBody>
+      </p:sp>
     </p:spTree>
   </p:cSld>
   <p:clrMapOvr>
@@ -13736,6 +13779,49 @@
           </a:ln>
         </p:spPr>
       </p:pic>
+      <p:sp>
+        <p:nvSpPr>
+          <p:cNvPr id="3" name="מציין מיקום של מספר שקופית 2">
+            <a:extLst>
+              <a:ext uri="{FF2B5EF4-FFF2-40B4-BE49-F238E27FC236}">
+                <a16:creationId xmlns:a16="http://schemas.microsoft.com/office/drawing/2014/main" id="{C2CEEE17-00F5-FA96-46B3-2908C0C743D5}"/>
+              </a:ext>
+            </a:extLst>
+          </p:cNvPr>
+          <p:cNvSpPr>
+            <a:spLocks noGrp="1"/>
+          </p:cNvSpPr>
+          <p:nvPr>
+            <p:ph type="sldNum" idx="12"/>
+          </p:nvPr>
+        </p:nvSpPr>
+        <p:spPr>
+          <a:xfrm>
+            <a:off x="9966581" y="6317067"/>
+            <a:ext cx="2133600" cy="365125"/>
+          </a:xfrm>
+        </p:spPr>
+        <p:txBody>
+          <a:bodyPr/>
+          <a:lstStyle/>
+          <a:p>
+            <a:pPr marL="0" lvl="0" indent="0" algn="r" rtl="0">
+              <a:spcBef>
+                <a:spcPts val="0"/>
+              </a:spcBef>
+              <a:spcAft>
+                <a:spcPts val="0"/>
+              </a:spcAft>
+              <a:buNone/>
+            </a:pPr>
+            <a:fld id="{00000000-1234-1234-1234-123412341234}" type="slidenum">
+              <a:rPr lang="en-US" smtClean="0"/>
+              <a:t>10</a:t>
+            </a:fld>
+            <a:endParaRPr lang="en-US" dirty="0"/>
+          </a:p>
+        </p:txBody>
+      </p:sp>
     </p:spTree>
   </p:cSld>
   <p:clrMapOvr>
@@ -14540,6 +14626,49 @@
           </a:ln>
         </p:spPr>
       </p:pic>
+      <p:sp>
+        <p:nvSpPr>
+          <p:cNvPr id="3" name="מציין מיקום של מספר שקופית 2">
+            <a:extLst>
+              <a:ext uri="{FF2B5EF4-FFF2-40B4-BE49-F238E27FC236}">
+                <a16:creationId xmlns:a16="http://schemas.microsoft.com/office/drawing/2014/main" id="{2CA9B7A4-51FF-1FA6-F426-3E543CCC787B}"/>
+              </a:ext>
+            </a:extLst>
+          </p:cNvPr>
+          <p:cNvSpPr>
+            <a:spLocks noGrp="1"/>
+          </p:cNvSpPr>
+          <p:nvPr>
+            <p:ph type="sldNum" idx="12"/>
+          </p:nvPr>
+        </p:nvSpPr>
+        <p:spPr>
+          <a:xfrm>
+            <a:off x="9926825" y="6396038"/>
+            <a:ext cx="2133600" cy="365125"/>
+          </a:xfrm>
+        </p:spPr>
+        <p:txBody>
+          <a:bodyPr/>
+          <a:lstStyle/>
+          <a:p>
+            <a:pPr marL="0" lvl="0" indent="0" algn="r" rtl="0">
+              <a:spcBef>
+                <a:spcPts val="0"/>
+              </a:spcBef>
+              <a:spcAft>
+                <a:spcPts val="0"/>
+              </a:spcAft>
+              <a:buNone/>
+            </a:pPr>
+            <a:fld id="{00000000-1234-1234-1234-123412341234}" type="slidenum">
+              <a:rPr lang="en-US" smtClean="0"/>
+              <a:t>11</a:t>
+            </a:fld>
+            <a:endParaRPr lang="en-US" dirty="0"/>
+          </a:p>
+        </p:txBody>
+      </p:sp>
     </p:spTree>
   </p:cSld>
   <p:clrMapOvr>
@@ -15171,6 +15300,49 @@
               <a:t>ההבדל משפות עיליות אחרות: שחרור זיכרון רציף, ללא תהליכי רקע.</a:t>
             </a:r>
             <a:endParaRPr lang="he-IL" sz="1600" noProof="0" dirty="0"/>
+          </a:p>
+        </p:txBody>
+      </p:sp>
+      <p:sp>
+        <p:nvSpPr>
+          <p:cNvPr id="3" name="מציין מיקום של מספר שקופית 2">
+            <a:extLst>
+              <a:ext uri="{FF2B5EF4-FFF2-40B4-BE49-F238E27FC236}">
+                <a16:creationId xmlns:a16="http://schemas.microsoft.com/office/drawing/2014/main" id="{0E737AF3-8F68-D00F-A0CC-64BC31B656E5}"/>
+              </a:ext>
+            </a:extLst>
+          </p:cNvPr>
+          <p:cNvSpPr>
+            <a:spLocks noGrp="1"/>
+          </p:cNvSpPr>
+          <p:nvPr>
+            <p:ph type="sldNum" idx="12"/>
+          </p:nvPr>
+        </p:nvSpPr>
+        <p:spPr>
+          <a:xfrm>
+            <a:off x="9977941" y="6430184"/>
+            <a:ext cx="2133600" cy="365125"/>
+          </a:xfrm>
+        </p:spPr>
+        <p:txBody>
+          <a:bodyPr/>
+          <a:lstStyle/>
+          <a:p>
+            <a:pPr marL="0" lvl="0" indent="0" algn="r" rtl="0">
+              <a:spcBef>
+                <a:spcPts val="0"/>
+              </a:spcBef>
+              <a:spcAft>
+                <a:spcPts val="0"/>
+              </a:spcAft>
+              <a:buNone/>
+            </a:pPr>
+            <a:fld id="{00000000-1234-1234-1234-123412341234}" type="slidenum">
+              <a:rPr lang="en-US" smtClean="0"/>
+              <a:t>12</a:t>
+            </a:fld>
+            <a:endParaRPr lang="en-US" dirty="0"/>
           </a:p>
         </p:txBody>
       </p:sp>
@@ -15874,6 +16046,49 @@
           </a:prstGeom>
         </p:spPr>
       </p:pic>
+      <p:sp>
+        <p:nvSpPr>
+          <p:cNvPr id="4" name="מציין מיקום של מספר שקופית 3">
+            <a:extLst>
+              <a:ext uri="{FF2B5EF4-FFF2-40B4-BE49-F238E27FC236}">
+                <a16:creationId xmlns:a16="http://schemas.microsoft.com/office/drawing/2014/main" id="{88B72848-5CF8-108E-1358-0A2D13A49F96}"/>
+              </a:ext>
+            </a:extLst>
+          </p:cNvPr>
+          <p:cNvSpPr>
+            <a:spLocks noGrp="1"/>
+          </p:cNvSpPr>
+          <p:nvPr>
+            <p:ph type="sldNum" idx="12"/>
+          </p:nvPr>
+        </p:nvSpPr>
+        <p:spPr>
+          <a:xfrm>
+            <a:off x="10012017" y="6439793"/>
+            <a:ext cx="2133600" cy="365125"/>
+          </a:xfrm>
+        </p:spPr>
+        <p:txBody>
+          <a:bodyPr/>
+          <a:lstStyle/>
+          <a:p>
+            <a:pPr marL="0" lvl="0" indent="0" algn="r" rtl="0">
+              <a:spcBef>
+                <a:spcPts val="0"/>
+              </a:spcBef>
+              <a:spcAft>
+                <a:spcPts val="0"/>
+              </a:spcAft>
+              <a:buNone/>
+            </a:pPr>
+            <a:fld id="{00000000-1234-1234-1234-123412341234}" type="slidenum">
+              <a:rPr lang="en-US" smtClean="0"/>
+              <a:t>13</a:t>
+            </a:fld>
+            <a:endParaRPr lang="en-US" dirty="0"/>
+          </a:p>
+        </p:txBody>
+      </p:sp>
     </p:spTree>
   </p:cSld>
   <p:clrMapOvr>
@@ -17865,6 +18080,271 @@
           </p:txBody>
         </p:sp>
       </p:grpSp>
+      <p:sp>
+        <p:nvSpPr>
+          <p:cNvPr id="2" name="מציין מיקום של מספר שקופית 2">
+            <a:extLst>
+              <a:ext uri="{FF2B5EF4-FFF2-40B4-BE49-F238E27FC236}">
+                <a16:creationId xmlns:a16="http://schemas.microsoft.com/office/drawing/2014/main" id="{76A14688-9170-0437-4A7A-A21AD52847C2}"/>
+              </a:ext>
+            </a:extLst>
+          </p:cNvPr>
+          <p:cNvSpPr txBox="1">
+            <a:spLocks/>
+          </p:cNvSpPr>
+          <p:nvPr/>
+        </p:nvSpPr>
+        <p:spPr>
+          <a:xfrm>
+            <a:off x="9972261" y="6381750"/>
+            <a:ext cx="2133600" cy="365125"/>
+          </a:xfrm>
+          <a:prstGeom prst="rect">
+            <a:avLst/>
+          </a:prstGeom>
+        </p:spPr>
+        <p:txBody>
+          <a:bodyPr/>
+          <a:lstStyle>
+            <a:defPPr marR="0" lvl="0" algn="l" rtl="0">
+              <a:lnSpc>
+                <a:spcPct val="100000"/>
+              </a:lnSpc>
+              <a:spcBef>
+                <a:spcPts val="0"/>
+              </a:spcBef>
+              <a:spcAft>
+                <a:spcPts val="0"/>
+              </a:spcAft>
+            </a:defPPr>
+            <a:lvl1pPr marR="0" lvl="0" algn="l" rtl="0">
+              <a:lnSpc>
+                <a:spcPct val="100000"/>
+              </a:lnSpc>
+              <a:spcBef>
+                <a:spcPts val="0"/>
+              </a:spcBef>
+              <a:spcAft>
+                <a:spcPts val="0"/>
+              </a:spcAft>
+              <a:buClr>
+                <a:srgbClr val="000000"/>
+              </a:buClr>
+              <a:buFont typeface="Arial"/>
+              <a:defRPr sz="1400" b="0" i="0" u="none" strike="noStrike" cap="none">
+                <a:solidFill>
+                  <a:srgbClr val="000000"/>
+                </a:solidFill>
+                <a:latin typeface="Arial"/>
+                <a:ea typeface="Arial"/>
+                <a:cs typeface="Arial"/>
+                <a:sym typeface="Arial"/>
+              </a:defRPr>
+            </a:lvl1pPr>
+            <a:lvl2pPr marR="0" lvl="1" algn="l" rtl="0">
+              <a:lnSpc>
+                <a:spcPct val="100000"/>
+              </a:lnSpc>
+              <a:spcBef>
+                <a:spcPts val="0"/>
+              </a:spcBef>
+              <a:spcAft>
+                <a:spcPts val="0"/>
+              </a:spcAft>
+              <a:buClr>
+                <a:srgbClr val="000000"/>
+              </a:buClr>
+              <a:buFont typeface="Arial"/>
+              <a:defRPr sz="1400" b="0" i="0" u="none" strike="noStrike" cap="none">
+                <a:solidFill>
+                  <a:srgbClr val="000000"/>
+                </a:solidFill>
+                <a:latin typeface="Arial"/>
+                <a:ea typeface="Arial"/>
+                <a:cs typeface="Arial"/>
+                <a:sym typeface="Arial"/>
+              </a:defRPr>
+            </a:lvl2pPr>
+            <a:lvl3pPr marR="0" lvl="2" algn="l" rtl="0">
+              <a:lnSpc>
+                <a:spcPct val="100000"/>
+              </a:lnSpc>
+              <a:spcBef>
+                <a:spcPts val="0"/>
+              </a:spcBef>
+              <a:spcAft>
+                <a:spcPts val="0"/>
+              </a:spcAft>
+              <a:buClr>
+                <a:srgbClr val="000000"/>
+              </a:buClr>
+              <a:buFont typeface="Arial"/>
+              <a:defRPr sz="1400" b="0" i="0" u="none" strike="noStrike" cap="none">
+                <a:solidFill>
+                  <a:srgbClr val="000000"/>
+                </a:solidFill>
+                <a:latin typeface="Arial"/>
+                <a:ea typeface="Arial"/>
+                <a:cs typeface="Arial"/>
+                <a:sym typeface="Arial"/>
+              </a:defRPr>
+            </a:lvl3pPr>
+            <a:lvl4pPr marR="0" lvl="3" algn="l" rtl="0">
+              <a:lnSpc>
+                <a:spcPct val="100000"/>
+              </a:lnSpc>
+              <a:spcBef>
+                <a:spcPts val="0"/>
+              </a:spcBef>
+              <a:spcAft>
+                <a:spcPts val="0"/>
+              </a:spcAft>
+              <a:buClr>
+                <a:srgbClr val="000000"/>
+              </a:buClr>
+              <a:buFont typeface="Arial"/>
+              <a:defRPr sz="1400" b="0" i="0" u="none" strike="noStrike" cap="none">
+                <a:solidFill>
+                  <a:srgbClr val="000000"/>
+                </a:solidFill>
+                <a:latin typeface="Arial"/>
+                <a:ea typeface="Arial"/>
+                <a:cs typeface="Arial"/>
+                <a:sym typeface="Arial"/>
+              </a:defRPr>
+            </a:lvl4pPr>
+            <a:lvl5pPr marR="0" lvl="4" algn="l" rtl="0">
+              <a:lnSpc>
+                <a:spcPct val="100000"/>
+              </a:lnSpc>
+              <a:spcBef>
+                <a:spcPts val="0"/>
+              </a:spcBef>
+              <a:spcAft>
+                <a:spcPts val="0"/>
+              </a:spcAft>
+              <a:buClr>
+                <a:srgbClr val="000000"/>
+              </a:buClr>
+              <a:buFont typeface="Arial"/>
+              <a:defRPr sz="1400" b="0" i="0" u="none" strike="noStrike" cap="none">
+                <a:solidFill>
+                  <a:srgbClr val="000000"/>
+                </a:solidFill>
+                <a:latin typeface="Arial"/>
+                <a:ea typeface="Arial"/>
+                <a:cs typeface="Arial"/>
+                <a:sym typeface="Arial"/>
+              </a:defRPr>
+            </a:lvl5pPr>
+            <a:lvl6pPr marR="0" lvl="5" algn="l" rtl="0">
+              <a:lnSpc>
+                <a:spcPct val="100000"/>
+              </a:lnSpc>
+              <a:spcBef>
+                <a:spcPts val="0"/>
+              </a:spcBef>
+              <a:spcAft>
+                <a:spcPts val="0"/>
+              </a:spcAft>
+              <a:buClr>
+                <a:srgbClr val="000000"/>
+              </a:buClr>
+              <a:buFont typeface="Arial"/>
+              <a:defRPr sz="1400" b="0" i="0" u="none" strike="noStrike" cap="none">
+                <a:solidFill>
+                  <a:srgbClr val="000000"/>
+                </a:solidFill>
+                <a:latin typeface="Arial"/>
+                <a:ea typeface="Arial"/>
+                <a:cs typeface="Arial"/>
+                <a:sym typeface="Arial"/>
+              </a:defRPr>
+            </a:lvl6pPr>
+            <a:lvl7pPr marR="0" lvl="6" algn="l" rtl="0">
+              <a:lnSpc>
+                <a:spcPct val="100000"/>
+              </a:lnSpc>
+              <a:spcBef>
+                <a:spcPts val="0"/>
+              </a:spcBef>
+              <a:spcAft>
+                <a:spcPts val="0"/>
+              </a:spcAft>
+              <a:buClr>
+                <a:srgbClr val="000000"/>
+              </a:buClr>
+              <a:buFont typeface="Arial"/>
+              <a:defRPr sz="1400" b="0" i="0" u="none" strike="noStrike" cap="none">
+                <a:solidFill>
+                  <a:srgbClr val="000000"/>
+                </a:solidFill>
+                <a:latin typeface="Arial"/>
+                <a:ea typeface="Arial"/>
+                <a:cs typeface="Arial"/>
+                <a:sym typeface="Arial"/>
+              </a:defRPr>
+            </a:lvl7pPr>
+            <a:lvl8pPr marR="0" lvl="7" algn="l" rtl="0">
+              <a:lnSpc>
+                <a:spcPct val="100000"/>
+              </a:lnSpc>
+              <a:spcBef>
+                <a:spcPts val="0"/>
+              </a:spcBef>
+              <a:spcAft>
+                <a:spcPts val="0"/>
+              </a:spcAft>
+              <a:buClr>
+                <a:srgbClr val="000000"/>
+              </a:buClr>
+              <a:buFont typeface="Arial"/>
+              <a:defRPr sz="1400" b="0" i="0" u="none" strike="noStrike" cap="none">
+                <a:solidFill>
+                  <a:srgbClr val="000000"/>
+                </a:solidFill>
+                <a:latin typeface="Arial"/>
+                <a:ea typeface="Arial"/>
+                <a:cs typeface="Arial"/>
+                <a:sym typeface="Arial"/>
+              </a:defRPr>
+            </a:lvl8pPr>
+            <a:lvl9pPr marR="0" lvl="8" algn="l" rtl="0">
+              <a:lnSpc>
+                <a:spcPct val="100000"/>
+              </a:lnSpc>
+              <a:spcBef>
+                <a:spcPts val="0"/>
+              </a:spcBef>
+              <a:spcAft>
+                <a:spcPts val="0"/>
+              </a:spcAft>
+              <a:buClr>
+                <a:srgbClr val="000000"/>
+              </a:buClr>
+              <a:buFont typeface="Arial"/>
+              <a:defRPr sz="1400" b="0" i="0" u="none" strike="noStrike" cap="none">
+                <a:solidFill>
+                  <a:srgbClr val="000000"/>
+                </a:solidFill>
+                <a:latin typeface="Arial"/>
+                <a:ea typeface="Arial"/>
+                <a:cs typeface="Arial"/>
+                <a:sym typeface="Arial"/>
+              </a:defRPr>
+            </a:lvl9pPr>
+          </a:lstStyle>
+          <a:p>
+            <a:pPr algn="r"/>
+            <a:fld id="{00000000-1234-1234-1234-123412341234}" type="slidenum">
+              <a:rPr lang="en-US" smtClean="0"/>
+              <a:pPr algn="r"/>
+              <a:t>14</a:t>
+            </a:fld>
+            <a:endParaRPr lang="en-US" dirty="0"/>
+          </a:p>
+        </p:txBody>
+      </p:sp>
     </p:spTree>
   </p:cSld>
   <p:clrMapOvr>
@@ -18423,6 +18903,285 @@
           </a:prstGeom>
         </p:spPr>
       </p:pic>
+      <p:sp>
+        <p:nvSpPr>
+          <p:cNvPr id="5" name="מציין מיקום של מספר שקופית 2">
+            <a:extLst>
+              <a:ext uri="{FF2B5EF4-FFF2-40B4-BE49-F238E27FC236}">
+                <a16:creationId xmlns:a16="http://schemas.microsoft.com/office/drawing/2014/main" id="{A1373F5B-0D29-4232-7C79-94E4F00FD2C2}"/>
+              </a:ext>
+            </a:extLst>
+          </p:cNvPr>
+          <p:cNvSpPr txBox="1">
+            <a:spLocks/>
+          </p:cNvSpPr>
+          <p:nvPr/>
+        </p:nvSpPr>
+        <p:spPr>
+          <a:xfrm>
+            <a:off x="9972261" y="6381750"/>
+            <a:ext cx="2133600" cy="365125"/>
+          </a:xfrm>
+          <a:prstGeom prst="rect">
+            <a:avLst/>
+          </a:prstGeom>
+          <a:noFill/>
+          <a:ln>
+            <a:noFill/>
+          </a:ln>
+        </p:spPr>
+        <p:txBody>
+          <a:bodyPr spcFirstLastPara="1" wrap="square" lIns="91425" tIns="45700" rIns="91425" bIns="45700" anchor="ctr" anchorCtr="0">
+            <a:noAutofit/>
+          </a:bodyPr>
+          <a:lstStyle>
+            <a:defPPr marR="0" lvl="0" algn="l" rtl="0">
+              <a:lnSpc>
+                <a:spcPct val="100000"/>
+              </a:lnSpc>
+              <a:spcBef>
+                <a:spcPts val="0"/>
+              </a:spcBef>
+              <a:spcAft>
+                <a:spcPts val="0"/>
+              </a:spcAft>
+            </a:defPPr>
+            <a:lvl1pPr marL="0" marR="0" lvl="0" indent="0" algn="r" rtl="0">
+              <a:lnSpc>
+                <a:spcPct val="100000"/>
+              </a:lnSpc>
+              <a:spcBef>
+                <a:spcPts val="0"/>
+              </a:spcBef>
+              <a:spcAft>
+                <a:spcPts val="0"/>
+              </a:spcAft>
+              <a:buClr>
+                <a:srgbClr val="000000"/>
+              </a:buClr>
+              <a:buFont typeface="Arial"/>
+              <a:buNone/>
+              <a:defRPr sz="1200" b="0" i="0" u="none" strike="noStrike" cap="none">
+                <a:solidFill>
+                  <a:srgbClr val="888888"/>
+                </a:solidFill>
+                <a:latin typeface="Calibri"/>
+                <a:ea typeface="Calibri"/>
+                <a:cs typeface="Calibri"/>
+                <a:sym typeface="Calibri"/>
+              </a:defRPr>
+            </a:lvl1pPr>
+            <a:lvl2pPr marL="0" marR="0" lvl="1" indent="0" algn="r" rtl="0">
+              <a:lnSpc>
+                <a:spcPct val="100000"/>
+              </a:lnSpc>
+              <a:spcBef>
+                <a:spcPts val="0"/>
+              </a:spcBef>
+              <a:spcAft>
+                <a:spcPts val="0"/>
+              </a:spcAft>
+              <a:buClr>
+                <a:srgbClr val="000000"/>
+              </a:buClr>
+              <a:buFont typeface="Arial"/>
+              <a:buNone/>
+              <a:defRPr sz="1200" b="0" i="0" u="none" strike="noStrike" cap="none">
+                <a:solidFill>
+                  <a:srgbClr val="888888"/>
+                </a:solidFill>
+                <a:latin typeface="Calibri"/>
+                <a:ea typeface="Calibri"/>
+                <a:cs typeface="Calibri"/>
+                <a:sym typeface="Calibri"/>
+              </a:defRPr>
+            </a:lvl2pPr>
+            <a:lvl3pPr marL="0" marR="0" lvl="2" indent="0" algn="r" rtl="0">
+              <a:lnSpc>
+                <a:spcPct val="100000"/>
+              </a:lnSpc>
+              <a:spcBef>
+                <a:spcPts val="0"/>
+              </a:spcBef>
+              <a:spcAft>
+                <a:spcPts val="0"/>
+              </a:spcAft>
+              <a:buClr>
+                <a:srgbClr val="000000"/>
+              </a:buClr>
+              <a:buFont typeface="Arial"/>
+              <a:buNone/>
+              <a:defRPr sz="1200" b="0" i="0" u="none" strike="noStrike" cap="none">
+                <a:solidFill>
+                  <a:srgbClr val="888888"/>
+                </a:solidFill>
+                <a:latin typeface="Calibri"/>
+                <a:ea typeface="Calibri"/>
+                <a:cs typeface="Calibri"/>
+                <a:sym typeface="Calibri"/>
+              </a:defRPr>
+            </a:lvl3pPr>
+            <a:lvl4pPr marL="0" marR="0" lvl="3" indent="0" algn="r" rtl="0">
+              <a:lnSpc>
+                <a:spcPct val="100000"/>
+              </a:lnSpc>
+              <a:spcBef>
+                <a:spcPts val="0"/>
+              </a:spcBef>
+              <a:spcAft>
+                <a:spcPts val="0"/>
+              </a:spcAft>
+              <a:buClr>
+                <a:srgbClr val="000000"/>
+              </a:buClr>
+              <a:buFont typeface="Arial"/>
+              <a:buNone/>
+              <a:defRPr sz="1200" b="0" i="0" u="none" strike="noStrike" cap="none">
+                <a:solidFill>
+                  <a:srgbClr val="888888"/>
+                </a:solidFill>
+                <a:latin typeface="Calibri"/>
+                <a:ea typeface="Calibri"/>
+                <a:cs typeface="Calibri"/>
+                <a:sym typeface="Calibri"/>
+              </a:defRPr>
+            </a:lvl4pPr>
+            <a:lvl5pPr marL="0" marR="0" lvl="4" indent="0" algn="r" rtl="0">
+              <a:lnSpc>
+                <a:spcPct val="100000"/>
+              </a:lnSpc>
+              <a:spcBef>
+                <a:spcPts val="0"/>
+              </a:spcBef>
+              <a:spcAft>
+                <a:spcPts val="0"/>
+              </a:spcAft>
+              <a:buClr>
+                <a:srgbClr val="000000"/>
+              </a:buClr>
+              <a:buFont typeface="Arial"/>
+              <a:buNone/>
+              <a:defRPr sz="1200" b="0" i="0" u="none" strike="noStrike" cap="none">
+                <a:solidFill>
+                  <a:srgbClr val="888888"/>
+                </a:solidFill>
+                <a:latin typeface="Calibri"/>
+                <a:ea typeface="Calibri"/>
+                <a:cs typeface="Calibri"/>
+                <a:sym typeface="Calibri"/>
+              </a:defRPr>
+            </a:lvl5pPr>
+            <a:lvl6pPr marL="0" marR="0" lvl="5" indent="0" algn="r" rtl="0">
+              <a:lnSpc>
+                <a:spcPct val="100000"/>
+              </a:lnSpc>
+              <a:spcBef>
+                <a:spcPts val="0"/>
+              </a:spcBef>
+              <a:spcAft>
+                <a:spcPts val="0"/>
+              </a:spcAft>
+              <a:buClr>
+                <a:srgbClr val="000000"/>
+              </a:buClr>
+              <a:buFont typeface="Arial"/>
+              <a:buNone/>
+              <a:defRPr sz="1200" b="0" i="0" u="none" strike="noStrike" cap="none">
+                <a:solidFill>
+                  <a:srgbClr val="888888"/>
+                </a:solidFill>
+                <a:latin typeface="Calibri"/>
+                <a:ea typeface="Calibri"/>
+                <a:cs typeface="Calibri"/>
+                <a:sym typeface="Calibri"/>
+              </a:defRPr>
+            </a:lvl6pPr>
+            <a:lvl7pPr marL="0" marR="0" lvl="6" indent="0" algn="r" rtl="0">
+              <a:lnSpc>
+                <a:spcPct val="100000"/>
+              </a:lnSpc>
+              <a:spcBef>
+                <a:spcPts val="0"/>
+              </a:spcBef>
+              <a:spcAft>
+                <a:spcPts val="0"/>
+              </a:spcAft>
+              <a:buClr>
+                <a:srgbClr val="000000"/>
+              </a:buClr>
+              <a:buFont typeface="Arial"/>
+              <a:buNone/>
+              <a:defRPr sz="1200" b="0" i="0" u="none" strike="noStrike" cap="none">
+                <a:solidFill>
+                  <a:srgbClr val="888888"/>
+                </a:solidFill>
+                <a:latin typeface="Calibri"/>
+                <a:ea typeface="Calibri"/>
+                <a:cs typeface="Calibri"/>
+                <a:sym typeface="Calibri"/>
+              </a:defRPr>
+            </a:lvl7pPr>
+            <a:lvl8pPr marL="0" marR="0" lvl="7" indent="0" algn="r" rtl="0">
+              <a:lnSpc>
+                <a:spcPct val="100000"/>
+              </a:lnSpc>
+              <a:spcBef>
+                <a:spcPts val="0"/>
+              </a:spcBef>
+              <a:spcAft>
+                <a:spcPts val="0"/>
+              </a:spcAft>
+              <a:buClr>
+                <a:srgbClr val="000000"/>
+              </a:buClr>
+              <a:buFont typeface="Arial"/>
+              <a:buNone/>
+              <a:defRPr sz="1200" b="0" i="0" u="none" strike="noStrike" cap="none">
+                <a:solidFill>
+                  <a:srgbClr val="888888"/>
+                </a:solidFill>
+                <a:latin typeface="Calibri"/>
+                <a:ea typeface="Calibri"/>
+                <a:cs typeface="Calibri"/>
+                <a:sym typeface="Calibri"/>
+              </a:defRPr>
+            </a:lvl8pPr>
+            <a:lvl9pPr marL="0" marR="0" lvl="8" indent="0" algn="r" rtl="0">
+              <a:lnSpc>
+                <a:spcPct val="100000"/>
+              </a:lnSpc>
+              <a:spcBef>
+                <a:spcPts val="0"/>
+              </a:spcBef>
+              <a:spcAft>
+                <a:spcPts val="0"/>
+              </a:spcAft>
+              <a:buClr>
+                <a:srgbClr val="000000"/>
+              </a:buClr>
+              <a:buFont typeface="Arial"/>
+              <a:buNone/>
+              <a:defRPr sz="1200" b="0" i="0" u="none" strike="noStrike" cap="none">
+                <a:solidFill>
+                  <a:srgbClr val="888888"/>
+                </a:solidFill>
+                <a:latin typeface="Calibri"/>
+                <a:ea typeface="Calibri"/>
+                <a:cs typeface="Calibri"/>
+                <a:sym typeface="Calibri"/>
+              </a:defRPr>
+            </a:lvl9pPr>
+          </a:lstStyle>
+          <a:p>
+            <a:fld id="{00000000-1234-1234-1234-123412341234}" type="slidenum">
+              <a:rPr lang="en-US" smtClean="0"/>
+              <a:pPr/>
+              <a:t>15</a:t>
+            </a:fld>
+            <a:endParaRPr lang="en-US" dirty="0"/>
+          </a:p>
+        </p:txBody>
+      </p:sp>
     </p:spTree>
   </p:cSld>
   <p:clrMapOvr>
@@ -20108,6 +20867,285 @@
           </a:p>
         </p:txBody>
       </p:sp>
+      <p:sp>
+        <p:nvSpPr>
+          <p:cNvPr id="4" name="מציין מיקום של מספר שקופית 2">
+            <a:extLst>
+              <a:ext uri="{FF2B5EF4-FFF2-40B4-BE49-F238E27FC236}">
+                <a16:creationId xmlns:a16="http://schemas.microsoft.com/office/drawing/2014/main" id="{BF41F93C-DDFB-9A30-4AF3-7FFF984C8B86}"/>
+              </a:ext>
+            </a:extLst>
+          </p:cNvPr>
+          <p:cNvSpPr txBox="1">
+            <a:spLocks/>
+          </p:cNvSpPr>
+          <p:nvPr/>
+        </p:nvSpPr>
+        <p:spPr>
+          <a:xfrm>
+            <a:off x="9972261" y="6381750"/>
+            <a:ext cx="2133600" cy="365125"/>
+          </a:xfrm>
+          <a:prstGeom prst="rect">
+            <a:avLst/>
+          </a:prstGeom>
+          <a:noFill/>
+          <a:ln>
+            <a:noFill/>
+          </a:ln>
+        </p:spPr>
+        <p:txBody>
+          <a:bodyPr spcFirstLastPara="1" wrap="square" lIns="91425" tIns="45700" rIns="91425" bIns="45700" anchor="ctr" anchorCtr="0">
+            <a:noAutofit/>
+          </a:bodyPr>
+          <a:lstStyle>
+            <a:defPPr marR="0" lvl="0" algn="l" rtl="0">
+              <a:lnSpc>
+                <a:spcPct val="100000"/>
+              </a:lnSpc>
+              <a:spcBef>
+                <a:spcPts val="0"/>
+              </a:spcBef>
+              <a:spcAft>
+                <a:spcPts val="0"/>
+              </a:spcAft>
+            </a:defPPr>
+            <a:lvl1pPr marL="0" marR="0" lvl="0" indent="0" algn="r" rtl="0">
+              <a:lnSpc>
+                <a:spcPct val="100000"/>
+              </a:lnSpc>
+              <a:spcBef>
+                <a:spcPts val="0"/>
+              </a:spcBef>
+              <a:spcAft>
+                <a:spcPts val="0"/>
+              </a:spcAft>
+              <a:buClr>
+                <a:srgbClr val="000000"/>
+              </a:buClr>
+              <a:buFont typeface="Arial"/>
+              <a:buNone/>
+              <a:defRPr sz="1200" b="0" i="0" u="none" strike="noStrike" cap="none">
+                <a:solidFill>
+                  <a:srgbClr val="888888"/>
+                </a:solidFill>
+                <a:latin typeface="Calibri"/>
+                <a:ea typeface="Calibri"/>
+                <a:cs typeface="Calibri"/>
+                <a:sym typeface="Calibri"/>
+              </a:defRPr>
+            </a:lvl1pPr>
+            <a:lvl2pPr marL="0" marR="0" lvl="1" indent="0" algn="r" rtl="0">
+              <a:lnSpc>
+                <a:spcPct val="100000"/>
+              </a:lnSpc>
+              <a:spcBef>
+                <a:spcPts val="0"/>
+              </a:spcBef>
+              <a:spcAft>
+                <a:spcPts val="0"/>
+              </a:spcAft>
+              <a:buClr>
+                <a:srgbClr val="000000"/>
+              </a:buClr>
+              <a:buFont typeface="Arial"/>
+              <a:buNone/>
+              <a:defRPr sz="1200" b="0" i="0" u="none" strike="noStrike" cap="none">
+                <a:solidFill>
+                  <a:srgbClr val="888888"/>
+                </a:solidFill>
+                <a:latin typeface="Calibri"/>
+                <a:ea typeface="Calibri"/>
+                <a:cs typeface="Calibri"/>
+                <a:sym typeface="Calibri"/>
+              </a:defRPr>
+            </a:lvl2pPr>
+            <a:lvl3pPr marL="0" marR="0" lvl="2" indent="0" algn="r" rtl="0">
+              <a:lnSpc>
+                <a:spcPct val="100000"/>
+              </a:lnSpc>
+              <a:spcBef>
+                <a:spcPts val="0"/>
+              </a:spcBef>
+              <a:spcAft>
+                <a:spcPts val="0"/>
+              </a:spcAft>
+              <a:buClr>
+                <a:srgbClr val="000000"/>
+              </a:buClr>
+              <a:buFont typeface="Arial"/>
+              <a:buNone/>
+              <a:defRPr sz="1200" b="0" i="0" u="none" strike="noStrike" cap="none">
+                <a:solidFill>
+                  <a:srgbClr val="888888"/>
+                </a:solidFill>
+                <a:latin typeface="Calibri"/>
+                <a:ea typeface="Calibri"/>
+                <a:cs typeface="Calibri"/>
+                <a:sym typeface="Calibri"/>
+              </a:defRPr>
+            </a:lvl3pPr>
+            <a:lvl4pPr marL="0" marR="0" lvl="3" indent="0" algn="r" rtl="0">
+              <a:lnSpc>
+                <a:spcPct val="100000"/>
+              </a:lnSpc>
+              <a:spcBef>
+                <a:spcPts val="0"/>
+              </a:spcBef>
+              <a:spcAft>
+                <a:spcPts val="0"/>
+              </a:spcAft>
+              <a:buClr>
+                <a:srgbClr val="000000"/>
+              </a:buClr>
+              <a:buFont typeface="Arial"/>
+              <a:buNone/>
+              <a:defRPr sz="1200" b="0" i="0" u="none" strike="noStrike" cap="none">
+                <a:solidFill>
+                  <a:srgbClr val="888888"/>
+                </a:solidFill>
+                <a:latin typeface="Calibri"/>
+                <a:ea typeface="Calibri"/>
+                <a:cs typeface="Calibri"/>
+                <a:sym typeface="Calibri"/>
+              </a:defRPr>
+            </a:lvl4pPr>
+            <a:lvl5pPr marL="0" marR="0" lvl="4" indent="0" algn="r" rtl="0">
+              <a:lnSpc>
+                <a:spcPct val="100000"/>
+              </a:lnSpc>
+              <a:spcBef>
+                <a:spcPts val="0"/>
+              </a:spcBef>
+              <a:spcAft>
+                <a:spcPts val="0"/>
+              </a:spcAft>
+              <a:buClr>
+                <a:srgbClr val="000000"/>
+              </a:buClr>
+              <a:buFont typeface="Arial"/>
+              <a:buNone/>
+              <a:defRPr sz="1200" b="0" i="0" u="none" strike="noStrike" cap="none">
+                <a:solidFill>
+                  <a:srgbClr val="888888"/>
+                </a:solidFill>
+                <a:latin typeface="Calibri"/>
+                <a:ea typeface="Calibri"/>
+                <a:cs typeface="Calibri"/>
+                <a:sym typeface="Calibri"/>
+              </a:defRPr>
+            </a:lvl5pPr>
+            <a:lvl6pPr marL="0" marR="0" lvl="5" indent="0" algn="r" rtl="0">
+              <a:lnSpc>
+                <a:spcPct val="100000"/>
+              </a:lnSpc>
+              <a:spcBef>
+                <a:spcPts val="0"/>
+              </a:spcBef>
+              <a:spcAft>
+                <a:spcPts val="0"/>
+              </a:spcAft>
+              <a:buClr>
+                <a:srgbClr val="000000"/>
+              </a:buClr>
+              <a:buFont typeface="Arial"/>
+              <a:buNone/>
+              <a:defRPr sz="1200" b="0" i="0" u="none" strike="noStrike" cap="none">
+                <a:solidFill>
+                  <a:srgbClr val="888888"/>
+                </a:solidFill>
+                <a:latin typeface="Calibri"/>
+                <a:ea typeface="Calibri"/>
+                <a:cs typeface="Calibri"/>
+                <a:sym typeface="Calibri"/>
+              </a:defRPr>
+            </a:lvl6pPr>
+            <a:lvl7pPr marL="0" marR="0" lvl="6" indent="0" algn="r" rtl="0">
+              <a:lnSpc>
+                <a:spcPct val="100000"/>
+              </a:lnSpc>
+              <a:spcBef>
+                <a:spcPts val="0"/>
+              </a:spcBef>
+              <a:spcAft>
+                <a:spcPts val="0"/>
+              </a:spcAft>
+              <a:buClr>
+                <a:srgbClr val="000000"/>
+              </a:buClr>
+              <a:buFont typeface="Arial"/>
+              <a:buNone/>
+              <a:defRPr sz="1200" b="0" i="0" u="none" strike="noStrike" cap="none">
+                <a:solidFill>
+                  <a:srgbClr val="888888"/>
+                </a:solidFill>
+                <a:latin typeface="Calibri"/>
+                <a:ea typeface="Calibri"/>
+                <a:cs typeface="Calibri"/>
+                <a:sym typeface="Calibri"/>
+              </a:defRPr>
+            </a:lvl7pPr>
+            <a:lvl8pPr marL="0" marR="0" lvl="7" indent="0" algn="r" rtl="0">
+              <a:lnSpc>
+                <a:spcPct val="100000"/>
+              </a:lnSpc>
+              <a:spcBef>
+                <a:spcPts val="0"/>
+              </a:spcBef>
+              <a:spcAft>
+                <a:spcPts val="0"/>
+              </a:spcAft>
+              <a:buClr>
+                <a:srgbClr val="000000"/>
+              </a:buClr>
+              <a:buFont typeface="Arial"/>
+              <a:buNone/>
+              <a:defRPr sz="1200" b="0" i="0" u="none" strike="noStrike" cap="none">
+                <a:solidFill>
+                  <a:srgbClr val="888888"/>
+                </a:solidFill>
+                <a:latin typeface="Calibri"/>
+                <a:ea typeface="Calibri"/>
+                <a:cs typeface="Calibri"/>
+                <a:sym typeface="Calibri"/>
+              </a:defRPr>
+            </a:lvl8pPr>
+            <a:lvl9pPr marL="0" marR="0" lvl="8" indent="0" algn="r" rtl="0">
+              <a:lnSpc>
+                <a:spcPct val="100000"/>
+              </a:lnSpc>
+              <a:spcBef>
+                <a:spcPts val="0"/>
+              </a:spcBef>
+              <a:spcAft>
+                <a:spcPts val="0"/>
+              </a:spcAft>
+              <a:buClr>
+                <a:srgbClr val="000000"/>
+              </a:buClr>
+              <a:buFont typeface="Arial"/>
+              <a:buNone/>
+              <a:defRPr sz="1200" b="0" i="0" u="none" strike="noStrike" cap="none">
+                <a:solidFill>
+                  <a:srgbClr val="888888"/>
+                </a:solidFill>
+                <a:latin typeface="Calibri"/>
+                <a:ea typeface="Calibri"/>
+                <a:cs typeface="Calibri"/>
+                <a:sym typeface="Calibri"/>
+              </a:defRPr>
+            </a:lvl9pPr>
+          </a:lstStyle>
+          <a:p>
+            <a:fld id="{00000000-1234-1234-1234-123412341234}" type="slidenum">
+              <a:rPr lang="en-US" smtClean="0"/>
+              <a:pPr/>
+              <a:t>16</a:t>
+            </a:fld>
+            <a:endParaRPr lang="en-US" dirty="0"/>
+          </a:p>
+        </p:txBody>
+      </p:sp>
     </p:spTree>
   </p:cSld>
   <p:clrMapOvr>
@@ -20906,6 +21944,285 @@
               <a:t>.</a:t>
             </a:r>
             <a:endParaRPr lang="he-IL" sz="2800" noProof="0" dirty="0"/>
+          </a:p>
+        </p:txBody>
+      </p:sp>
+      <p:sp>
+        <p:nvSpPr>
+          <p:cNvPr id="8" name="מציין מיקום של מספר שקופית 2">
+            <a:extLst>
+              <a:ext uri="{FF2B5EF4-FFF2-40B4-BE49-F238E27FC236}">
+                <a16:creationId xmlns:a16="http://schemas.microsoft.com/office/drawing/2014/main" id="{C411F440-59F0-CBD6-F7DA-5C56A2518DBE}"/>
+              </a:ext>
+            </a:extLst>
+          </p:cNvPr>
+          <p:cNvSpPr txBox="1">
+            <a:spLocks/>
+          </p:cNvSpPr>
+          <p:nvPr/>
+        </p:nvSpPr>
+        <p:spPr>
+          <a:xfrm>
+            <a:off x="9972261" y="6381750"/>
+            <a:ext cx="2133600" cy="365125"/>
+          </a:xfrm>
+          <a:prstGeom prst="rect">
+            <a:avLst/>
+          </a:prstGeom>
+          <a:noFill/>
+          <a:ln>
+            <a:noFill/>
+          </a:ln>
+        </p:spPr>
+        <p:txBody>
+          <a:bodyPr spcFirstLastPara="1" wrap="square" lIns="91425" tIns="45700" rIns="91425" bIns="45700" anchor="ctr" anchorCtr="0">
+            <a:noAutofit/>
+          </a:bodyPr>
+          <a:lstStyle>
+            <a:defPPr marR="0" lvl="0" algn="l" rtl="0">
+              <a:lnSpc>
+                <a:spcPct val="100000"/>
+              </a:lnSpc>
+              <a:spcBef>
+                <a:spcPts val="0"/>
+              </a:spcBef>
+              <a:spcAft>
+                <a:spcPts val="0"/>
+              </a:spcAft>
+            </a:defPPr>
+            <a:lvl1pPr marL="0" marR="0" lvl="0" indent="0" algn="r" rtl="0">
+              <a:lnSpc>
+                <a:spcPct val="100000"/>
+              </a:lnSpc>
+              <a:spcBef>
+                <a:spcPts val="0"/>
+              </a:spcBef>
+              <a:spcAft>
+                <a:spcPts val="0"/>
+              </a:spcAft>
+              <a:buClr>
+                <a:srgbClr val="000000"/>
+              </a:buClr>
+              <a:buFont typeface="Arial"/>
+              <a:buNone/>
+              <a:defRPr sz="1200" b="0" i="0" u="none" strike="noStrike" cap="none">
+                <a:solidFill>
+                  <a:srgbClr val="888888"/>
+                </a:solidFill>
+                <a:latin typeface="Calibri"/>
+                <a:ea typeface="Calibri"/>
+                <a:cs typeface="Calibri"/>
+                <a:sym typeface="Calibri"/>
+              </a:defRPr>
+            </a:lvl1pPr>
+            <a:lvl2pPr marL="0" marR="0" lvl="1" indent="0" algn="r" rtl="0">
+              <a:lnSpc>
+                <a:spcPct val="100000"/>
+              </a:lnSpc>
+              <a:spcBef>
+                <a:spcPts val="0"/>
+              </a:spcBef>
+              <a:spcAft>
+                <a:spcPts val="0"/>
+              </a:spcAft>
+              <a:buClr>
+                <a:srgbClr val="000000"/>
+              </a:buClr>
+              <a:buFont typeface="Arial"/>
+              <a:buNone/>
+              <a:defRPr sz="1200" b="0" i="0" u="none" strike="noStrike" cap="none">
+                <a:solidFill>
+                  <a:srgbClr val="888888"/>
+                </a:solidFill>
+                <a:latin typeface="Calibri"/>
+                <a:ea typeface="Calibri"/>
+                <a:cs typeface="Calibri"/>
+                <a:sym typeface="Calibri"/>
+              </a:defRPr>
+            </a:lvl2pPr>
+            <a:lvl3pPr marL="0" marR="0" lvl="2" indent="0" algn="r" rtl="0">
+              <a:lnSpc>
+                <a:spcPct val="100000"/>
+              </a:lnSpc>
+              <a:spcBef>
+                <a:spcPts val="0"/>
+              </a:spcBef>
+              <a:spcAft>
+                <a:spcPts val="0"/>
+              </a:spcAft>
+              <a:buClr>
+                <a:srgbClr val="000000"/>
+              </a:buClr>
+              <a:buFont typeface="Arial"/>
+              <a:buNone/>
+              <a:defRPr sz="1200" b="0" i="0" u="none" strike="noStrike" cap="none">
+                <a:solidFill>
+                  <a:srgbClr val="888888"/>
+                </a:solidFill>
+                <a:latin typeface="Calibri"/>
+                <a:ea typeface="Calibri"/>
+                <a:cs typeface="Calibri"/>
+                <a:sym typeface="Calibri"/>
+              </a:defRPr>
+            </a:lvl3pPr>
+            <a:lvl4pPr marL="0" marR="0" lvl="3" indent="0" algn="r" rtl="0">
+              <a:lnSpc>
+                <a:spcPct val="100000"/>
+              </a:lnSpc>
+              <a:spcBef>
+                <a:spcPts val="0"/>
+              </a:spcBef>
+              <a:spcAft>
+                <a:spcPts val="0"/>
+              </a:spcAft>
+              <a:buClr>
+                <a:srgbClr val="000000"/>
+              </a:buClr>
+              <a:buFont typeface="Arial"/>
+              <a:buNone/>
+              <a:defRPr sz="1200" b="0" i="0" u="none" strike="noStrike" cap="none">
+                <a:solidFill>
+                  <a:srgbClr val="888888"/>
+                </a:solidFill>
+                <a:latin typeface="Calibri"/>
+                <a:ea typeface="Calibri"/>
+                <a:cs typeface="Calibri"/>
+                <a:sym typeface="Calibri"/>
+              </a:defRPr>
+            </a:lvl4pPr>
+            <a:lvl5pPr marL="0" marR="0" lvl="4" indent="0" algn="r" rtl="0">
+              <a:lnSpc>
+                <a:spcPct val="100000"/>
+              </a:lnSpc>
+              <a:spcBef>
+                <a:spcPts val="0"/>
+              </a:spcBef>
+              <a:spcAft>
+                <a:spcPts val="0"/>
+              </a:spcAft>
+              <a:buClr>
+                <a:srgbClr val="000000"/>
+              </a:buClr>
+              <a:buFont typeface="Arial"/>
+              <a:buNone/>
+              <a:defRPr sz="1200" b="0" i="0" u="none" strike="noStrike" cap="none">
+                <a:solidFill>
+                  <a:srgbClr val="888888"/>
+                </a:solidFill>
+                <a:latin typeface="Calibri"/>
+                <a:ea typeface="Calibri"/>
+                <a:cs typeface="Calibri"/>
+                <a:sym typeface="Calibri"/>
+              </a:defRPr>
+            </a:lvl5pPr>
+            <a:lvl6pPr marL="0" marR="0" lvl="5" indent="0" algn="r" rtl="0">
+              <a:lnSpc>
+                <a:spcPct val="100000"/>
+              </a:lnSpc>
+              <a:spcBef>
+                <a:spcPts val="0"/>
+              </a:spcBef>
+              <a:spcAft>
+                <a:spcPts val="0"/>
+              </a:spcAft>
+              <a:buClr>
+                <a:srgbClr val="000000"/>
+              </a:buClr>
+              <a:buFont typeface="Arial"/>
+              <a:buNone/>
+              <a:defRPr sz="1200" b="0" i="0" u="none" strike="noStrike" cap="none">
+                <a:solidFill>
+                  <a:srgbClr val="888888"/>
+                </a:solidFill>
+                <a:latin typeface="Calibri"/>
+                <a:ea typeface="Calibri"/>
+                <a:cs typeface="Calibri"/>
+                <a:sym typeface="Calibri"/>
+              </a:defRPr>
+            </a:lvl6pPr>
+            <a:lvl7pPr marL="0" marR="0" lvl="6" indent="0" algn="r" rtl="0">
+              <a:lnSpc>
+                <a:spcPct val="100000"/>
+              </a:lnSpc>
+              <a:spcBef>
+                <a:spcPts val="0"/>
+              </a:spcBef>
+              <a:spcAft>
+                <a:spcPts val="0"/>
+              </a:spcAft>
+              <a:buClr>
+                <a:srgbClr val="000000"/>
+              </a:buClr>
+              <a:buFont typeface="Arial"/>
+              <a:buNone/>
+              <a:defRPr sz="1200" b="0" i="0" u="none" strike="noStrike" cap="none">
+                <a:solidFill>
+                  <a:srgbClr val="888888"/>
+                </a:solidFill>
+                <a:latin typeface="Calibri"/>
+                <a:ea typeface="Calibri"/>
+                <a:cs typeface="Calibri"/>
+                <a:sym typeface="Calibri"/>
+              </a:defRPr>
+            </a:lvl7pPr>
+            <a:lvl8pPr marL="0" marR="0" lvl="7" indent="0" algn="r" rtl="0">
+              <a:lnSpc>
+                <a:spcPct val="100000"/>
+              </a:lnSpc>
+              <a:spcBef>
+                <a:spcPts val="0"/>
+              </a:spcBef>
+              <a:spcAft>
+                <a:spcPts val="0"/>
+              </a:spcAft>
+              <a:buClr>
+                <a:srgbClr val="000000"/>
+              </a:buClr>
+              <a:buFont typeface="Arial"/>
+              <a:buNone/>
+              <a:defRPr sz="1200" b="0" i="0" u="none" strike="noStrike" cap="none">
+                <a:solidFill>
+                  <a:srgbClr val="888888"/>
+                </a:solidFill>
+                <a:latin typeface="Calibri"/>
+                <a:ea typeface="Calibri"/>
+                <a:cs typeface="Calibri"/>
+                <a:sym typeface="Calibri"/>
+              </a:defRPr>
+            </a:lvl8pPr>
+            <a:lvl9pPr marL="0" marR="0" lvl="8" indent="0" algn="r" rtl="0">
+              <a:lnSpc>
+                <a:spcPct val="100000"/>
+              </a:lnSpc>
+              <a:spcBef>
+                <a:spcPts val="0"/>
+              </a:spcBef>
+              <a:spcAft>
+                <a:spcPts val="0"/>
+              </a:spcAft>
+              <a:buClr>
+                <a:srgbClr val="000000"/>
+              </a:buClr>
+              <a:buFont typeface="Arial"/>
+              <a:buNone/>
+              <a:defRPr sz="1200" b="0" i="0" u="none" strike="noStrike" cap="none">
+                <a:solidFill>
+                  <a:srgbClr val="888888"/>
+                </a:solidFill>
+                <a:latin typeface="Calibri"/>
+                <a:ea typeface="Calibri"/>
+                <a:cs typeface="Calibri"/>
+                <a:sym typeface="Calibri"/>
+              </a:defRPr>
+            </a:lvl9pPr>
+          </a:lstStyle>
+          <a:p>
+            <a:fld id="{00000000-1234-1234-1234-123412341234}" type="slidenum">
+              <a:rPr lang="en-US" smtClean="0"/>
+              <a:pPr/>
+              <a:t>17</a:t>
+            </a:fld>
+            <a:endParaRPr lang="en-US" dirty="0"/>
           </a:p>
         </p:txBody>
       </p:sp>
@@ -21578,6 +22895,285 @@
           </a:prstGeom>
         </p:spPr>
       </p:pic>
+      <p:sp>
+        <p:nvSpPr>
+          <p:cNvPr id="6" name="מציין מיקום של מספר שקופית 2">
+            <a:extLst>
+              <a:ext uri="{FF2B5EF4-FFF2-40B4-BE49-F238E27FC236}">
+                <a16:creationId xmlns:a16="http://schemas.microsoft.com/office/drawing/2014/main" id="{7A70324A-7491-05C9-D7DD-7D9CF63A3BF6}"/>
+              </a:ext>
+            </a:extLst>
+          </p:cNvPr>
+          <p:cNvSpPr txBox="1">
+            <a:spLocks/>
+          </p:cNvSpPr>
+          <p:nvPr/>
+        </p:nvSpPr>
+        <p:spPr>
+          <a:xfrm>
+            <a:off x="9972261" y="6393110"/>
+            <a:ext cx="2133600" cy="365125"/>
+          </a:xfrm>
+          <a:prstGeom prst="rect">
+            <a:avLst/>
+          </a:prstGeom>
+          <a:noFill/>
+          <a:ln>
+            <a:noFill/>
+          </a:ln>
+        </p:spPr>
+        <p:txBody>
+          <a:bodyPr spcFirstLastPara="1" wrap="square" lIns="91425" tIns="45700" rIns="91425" bIns="45700" anchor="ctr" anchorCtr="0">
+            <a:noAutofit/>
+          </a:bodyPr>
+          <a:lstStyle>
+            <a:defPPr marR="0" lvl="0" algn="l" rtl="0">
+              <a:lnSpc>
+                <a:spcPct val="100000"/>
+              </a:lnSpc>
+              <a:spcBef>
+                <a:spcPts val="0"/>
+              </a:spcBef>
+              <a:spcAft>
+                <a:spcPts val="0"/>
+              </a:spcAft>
+            </a:defPPr>
+            <a:lvl1pPr marL="0" marR="0" lvl="0" indent="0" algn="r" rtl="0">
+              <a:lnSpc>
+                <a:spcPct val="100000"/>
+              </a:lnSpc>
+              <a:spcBef>
+                <a:spcPts val="0"/>
+              </a:spcBef>
+              <a:spcAft>
+                <a:spcPts val="0"/>
+              </a:spcAft>
+              <a:buClr>
+                <a:srgbClr val="000000"/>
+              </a:buClr>
+              <a:buFont typeface="Arial"/>
+              <a:buNone/>
+              <a:defRPr sz="1200" b="0" i="0" u="none" strike="noStrike" cap="none">
+                <a:solidFill>
+                  <a:srgbClr val="888888"/>
+                </a:solidFill>
+                <a:latin typeface="Calibri"/>
+                <a:ea typeface="Calibri"/>
+                <a:cs typeface="Calibri"/>
+                <a:sym typeface="Calibri"/>
+              </a:defRPr>
+            </a:lvl1pPr>
+            <a:lvl2pPr marL="0" marR="0" lvl="1" indent="0" algn="r" rtl="0">
+              <a:lnSpc>
+                <a:spcPct val="100000"/>
+              </a:lnSpc>
+              <a:spcBef>
+                <a:spcPts val="0"/>
+              </a:spcBef>
+              <a:spcAft>
+                <a:spcPts val="0"/>
+              </a:spcAft>
+              <a:buClr>
+                <a:srgbClr val="000000"/>
+              </a:buClr>
+              <a:buFont typeface="Arial"/>
+              <a:buNone/>
+              <a:defRPr sz="1200" b="0" i="0" u="none" strike="noStrike" cap="none">
+                <a:solidFill>
+                  <a:srgbClr val="888888"/>
+                </a:solidFill>
+                <a:latin typeface="Calibri"/>
+                <a:ea typeface="Calibri"/>
+                <a:cs typeface="Calibri"/>
+                <a:sym typeface="Calibri"/>
+              </a:defRPr>
+            </a:lvl2pPr>
+            <a:lvl3pPr marL="0" marR="0" lvl="2" indent="0" algn="r" rtl="0">
+              <a:lnSpc>
+                <a:spcPct val="100000"/>
+              </a:lnSpc>
+              <a:spcBef>
+                <a:spcPts val="0"/>
+              </a:spcBef>
+              <a:spcAft>
+                <a:spcPts val="0"/>
+              </a:spcAft>
+              <a:buClr>
+                <a:srgbClr val="000000"/>
+              </a:buClr>
+              <a:buFont typeface="Arial"/>
+              <a:buNone/>
+              <a:defRPr sz="1200" b="0" i="0" u="none" strike="noStrike" cap="none">
+                <a:solidFill>
+                  <a:srgbClr val="888888"/>
+                </a:solidFill>
+                <a:latin typeface="Calibri"/>
+                <a:ea typeface="Calibri"/>
+                <a:cs typeface="Calibri"/>
+                <a:sym typeface="Calibri"/>
+              </a:defRPr>
+            </a:lvl3pPr>
+            <a:lvl4pPr marL="0" marR="0" lvl="3" indent="0" algn="r" rtl="0">
+              <a:lnSpc>
+                <a:spcPct val="100000"/>
+              </a:lnSpc>
+              <a:spcBef>
+                <a:spcPts val="0"/>
+              </a:spcBef>
+              <a:spcAft>
+                <a:spcPts val="0"/>
+              </a:spcAft>
+              <a:buClr>
+                <a:srgbClr val="000000"/>
+              </a:buClr>
+              <a:buFont typeface="Arial"/>
+              <a:buNone/>
+              <a:defRPr sz="1200" b="0" i="0" u="none" strike="noStrike" cap="none">
+                <a:solidFill>
+                  <a:srgbClr val="888888"/>
+                </a:solidFill>
+                <a:latin typeface="Calibri"/>
+                <a:ea typeface="Calibri"/>
+                <a:cs typeface="Calibri"/>
+                <a:sym typeface="Calibri"/>
+              </a:defRPr>
+            </a:lvl4pPr>
+            <a:lvl5pPr marL="0" marR="0" lvl="4" indent="0" algn="r" rtl="0">
+              <a:lnSpc>
+                <a:spcPct val="100000"/>
+              </a:lnSpc>
+              <a:spcBef>
+                <a:spcPts val="0"/>
+              </a:spcBef>
+              <a:spcAft>
+                <a:spcPts val="0"/>
+              </a:spcAft>
+              <a:buClr>
+                <a:srgbClr val="000000"/>
+              </a:buClr>
+              <a:buFont typeface="Arial"/>
+              <a:buNone/>
+              <a:defRPr sz="1200" b="0" i="0" u="none" strike="noStrike" cap="none">
+                <a:solidFill>
+                  <a:srgbClr val="888888"/>
+                </a:solidFill>
+                <a:latin typeface="Calibri"/>
+                <a:ea typeface="Calibri"/>
+                <a:cs typeface="Calibri"/>
+                <a:sym typeface="Calibri"/>
+              </a:defRPr>
+            </a:lvl5pPr>
+            <a:lvl6pPr marL="0" marR="0" lvl="5" indent="0" algn="r" rtl="0">
+              <a:lnSpc>
+                <a:spcPct val="100000"/>
+              </a:lnSpc>
+              <a:spcBef>
+                <a:spcPts val="0"/>
+              </a:spcBef>
+              <a:spcAft>
+                <a:spcPts val="0"/>
+              </a:spcAft>
+              <a:buClr>
+                <a:srgbClr val="000000"/>
+              </a:buClr>
+              <a:buFont typeface="Arial"/>
+              <a:buNone/>
+              <a:defRPr sz="1200" b="0" i="0" u="none" strike="noStrike" cap="none">
+                <a:solidFill>
+                  <a:srgbClr val="888888"/>
+                </a:solidFill>
+                <a:latin typeface="Calibri"/>
+                <a:ea typeface="Calibri"/>
+                <a:cs typeface="Calibri"/>
+                <a:sym typeface="Calibri"/>
+              </a:defRPr>
+            </a:lvl6pPr>
+            <a:lvl7pPr marL="0" marR="0" lvl="6" indent="0" algn="r" rtl="0">
+              <a:lnSpc>
+                <a:spcPct val="100000"/>
+              </a:lnSpc>
+              <a:spcBef>
+                <a:spcPts val="0"/>
+              </a:spcBef>
+              <a:spcAft>
+                <a:spcPts val="0"/>
+              </a:spcAft>
+              <a:buClr>
+                <a:srgbClr val="000000"/>
+              </a:buClr>
+              <a:buFont typeface="Arial"/>
+              <a:buNone/>
+              <a:defRPr sz="1200" b="0" i="0" u="none" strike="noStrike" cap="none">
+                <a:solidFill>
+                  <a:srgbClr val="888888"/>
+                </a:solidFill>
+                <a:latin typeface="Calibri"/>
+                <a:ea typeface="Calibri"/>
+                <a:cs typeface="Calibri"/>
+                <a:sym typeface="Calibri"/>
+              </a:defRPr>
+            </a:lvl7pPr>
+            <a:lvl8pPr marL="0" marR="0" lvl="7" indent="0" algn="r" rtl="0">
+              <a:lnSpc>
+                <a:spcPct val="100000"/>
+              </a:lnSpc>
+              <a:spcBef>
+                <a:spcPts val="0"/>
+              </a:spcBef>
+              <a:spcAft>
+                <a:spcPts val="0"/>
+              </a:spcAft>
+              <a:buClr>
+                <a:srgbClr val="000000"/>
+              </a:buClr>
+              <a:buFont typeface="Arial"/>
+              <a:buNone/>
+              <a:defRPr sz="1200" b="0" i="0" u="none" strike="noStrike" cap="none">
+                <a:solidFill>
+                  <a:srgbClr val="888888"/>
+                </a:solidFill>
+                <a:latin typeface="Calibri"/>
+                <a:ea typeface="Calibri"/>
+                <a:cs typeface="Calibri"/>
+                <a:sym typeface="Calibri"/>
+              </a:defRPr>
+            </a:lvl8pPr>
+            <a:lvl9pPr marL="0" marR="0" lvl="8" indent="0" algn="r" rtl="0">
+              <a:lnSpc>
+                <a:spcPct val="100000"/>
+              </a:lnSpc>
+              <a:spcBef>
+                <a:spcPts val="0"/>
+              </a:spcBef>
+              <a:spcAft>
+                <a:spcPts val="0"/>
+              </a:spcAft>
+              <a:buClr>
+                <a:srgbClr val="000000"/>
+              </a:buClr>
+              <a:buFont typeface="Arial"/>
+              <a:buNone/>
+              <a:defRPr sz="1200" b="0" i="0" u="none" strike="noStrike" cap="none">
+                <a:solidFill>
+                  <a:srgbClr val="888888"/>
+                </a:solidFill>
+                <a:latin typeface="Calibri"/>
+                <a:ea typeface="Calibri"/>
+                <a:cs typeface="Calibri"/>
+                <a:sym typeface="Calibri"/>
+              </a:defRPr>
+            </a:lvl9pPr>
+          </a:lstStyle>
+          <a:p>
+            <a:fld id="{00000000-1234-1234-1234-123412341234}" type="slidenum">
+              <a:rPr lang="en-US" smtClean="0"/>
+              <a:pPr/>
+              <a:t>18</a:t>
+            </a:fld>
+            <a:endParaRPr lang="en-US" dirty="0"/>
+          </a:p>
+        </p:txBody>
+      </p:sp>
     </p:spTree>
   </p:cSld>
   <p:clrMapOvr>
@@ -22176,6 +23772,285 @@
           </a:prstGeom>
         </p:spPr>
       </p:pic>
+      <p:sp>
+        <p:nvSpPr>
+          <p:cNvPr id="5" name="מציין מיקום של מספר שקופית 2">
+            <a:extLst>
+              <a:ext uri="{FF2B5EF4-FFF2-40B4-BE49-F238E27FC236}">
+                <a16:creationId xmlns:a16="http://schemas.microsoft.com/office/drawing/2014/main" id="{08B00D3C-620D-8596-FF4C-048720987779}"/>
+              </a:ext>
+            </a:extLst>
+          </p:cNvPr>
+          <p:cNvSpPr txBox="1">
+            <a:spLocks/>
+          </p:cNvSpPr>
+          <p:nvPr/>
+        </p:nvSpPr>
+        <p:spPr>
+          <a:xfrm>
+            <a:off x="9972261" y="6381750"/>
+            <a:ext cx="2133600" cy="365125"/>
+          </a:xfrm>
+          <a:prstGeom prst="rect">
+            <a:avLst/>
+          </a:prstGeom>
+          <a:noFill/>
+          <a:ln>
+            <a:noFill/>
+          </a:ln>
+        </p:spPr>
+        <p:txBody>
+          <a:bodyPr spcFirstLastPara="1" wrap="square" lIns="91425" tIns="45700" rIns="91425" bIns="45700" anchor="ctr" anchorCtr="0">
+            <a:noAutofit/>
+          </a:bodyPr>
+          <a:lstStyle>
+            <a:defPPr marR="0" lvl="0" algn="l" rtl="0">
+              <a:lnSpc>
+                <a:spcPct val="100000"/>
+              </a:lnSpc>
+              <a:spcBef>
+                <a:spcPts val="0"/>
+              </a:spcBef>
+              <a:spcAft>
+                <a:spcPts val="0"/>
+              </a:spcAft>
+            </a:defPPr>
+            <a:lvl1pPr marL="0" marR="0" lvl="0" indent="0" algn="r" rtl="0">
+              <a:lnSpc>
+                <a:spcPct val="100000"/>
+              </a:lnSpc>
+              <a:spcBef>
+                <a:spcPts val="0"/>
+              </a:spcBef>
+              <a:spcAft>
+                <a:spcPts val="0"/>
+              </a:spcAft>
+              <a:buClr>
+                <a:srgbClr val="000000"/>
+              </a:buClr>
+              <a:buFont typeface="Arial"/>
+              <a:buNone/>
+              <a:defRPr sz="1200" b="0" i="0" u="none" strike="noStrike" cap="none">
+                <a:solidFill>
+                  <a:srgbClr val="888888"/>
+                </a:solidFill>
+                <a:latin typeface="Calibri"/>
+                <a:ea typeface="Calibri"/>
+                <a:cs typeface="Calibri"/>
+                <a:sym typeface="Calibri"/>
+              </a:defRPr>
+            </a:lvl1pPr>
+            <a:lvl2pPr marL="0" marR="0" lvl="1" indent="0" algn="r" rtl="0">
+              <a:lnSpc>
+                <a:spcPct val="100000"/>
+              </a:lnSpc>
+              <a:spcBef>
+                <a:spcPts val="0"/>
+              </a:spcBef>
+              <a:spcAft>
+                <a:spcPts val="0"/>
+              </a:spcAft>
+              <a:buClr>
+                <a:srgbClr val="000000"/>
+              </a:buClr>
+              <a:buFont typeface="Arial"/>
+              <a:buNone/>
+              <a:defRPr sz="1200" b="0" i="0" u="none" strike="noStrike" cap="none">
+                <a:solidFill>
+                  <a:srgbClr val="888888"/>
+                </a:solidFill>
+                <a:latin typeface="Calibri"/>
+                <a:ea typeface="Calibri"/>
+                <a:cs typeface="Calibri"/>
+                <a:sym typeface="Calibri"/>
+              </a:defRPr>
+            </a:lvl2pPr>
+            <a:lvl3pPr marL="0" marR="0" lvl="2" indent="0" algn="r" rtl="0">
+              <a:lnSpc>
+                <a:spcPct val="100000"/>
+              </a:lnSpc>
+              <a:spcBef>
+                <a:spcPts val="0"/>
+              </a:spcBef>
+              <a:spcAft>
+                <a:spcPts val="0"/>
+              </a:spcAft>
+              <a:buClr>
+                <a:srgbClr val="000000"/>
+              </a:buClr>
+              <a:buFont typeface="Arial"/>
+              <a:buNone/>
+              <a:defRPr sz="1200" b="0" i="0" u="none" strike="noStrike" cap="none">
+                <a:solidFill>
+                  <a:srgbClr val="888888"/>
+                </a:solidFill>
+                <a:latin typeface="Calibri"/>
+                <a:ea typeface="Calibri"/>
+                <a:cs typeface="Calibri"/>
+                <a:sym typeface="Calibri"/>
+              </a:defRPr>
+            </a:lvl3pPr>
+            <a:lvl4pPr marL="0" marR="0" lvl="3" indent="0" algn="r" rtl="0">
+              <a:lnSpc>
+                <a:spcPct val="100000"/>
+              </a:lnSpc>
+              <a:spcBef>
+                <a:spcPts val="0"/>
+              </a:spcBef>
+              <a:spcAft>
+                <a:spcPts val="0"/>
+              </a:spcAft>
+              <a:buClr>
+                <a:srgbClr val="000000"/>
+              </a:buClr>
+              <a:buFont typeface="Arial"/>
+              <a:buNone/>
+              <a:defRPr sz="1200" b="0" i="0" u="none" strike="noStrike" cap="none">
+                <a:solidFill>
+                  <a:srgbClr val="888888"/>
+                </a:solidFill>
+                <a:latin typeface="Calibri"/>
+                <a:ea typeface="Calibri"/>
+                <a:cs typeface="Calibri"/>
+                <a:sym typeface="Calibri"/>
+              </a:defRPr>
+            </a:lvl4pPr>
+            <a:lvl5pPr marL="0" marR="0" lvl="4" indent="0" algn="r" rtl="0">
+              <a:lnSpc>
+                <a:spcPct val="100000"/>
+              </a:lnSpc>
+              <a:spcBef>
+                <a:spcPts val="0"/>
+              </a:spcBef>
+              <a:spcAft>
+                <a:spcPts val="0"/>
+              </a:spcAft>
+              <a:buClr>
+                <a:srgbClr val="000000"/>
+              </a:buClr>
+              <a:buFont typeface="Arial"/>
+              <a:buNone/>
+              <a:defRPr sz="1200" b="0" i="0" u="none" strike="noStrike" cap="none">
+                <a:solidFill>
+                  <a:srgbClr val="888888"/>
+                </a:solidFill>
+                <a:latin typeface="Calibri"/>
+                <a:ea typeface="Calibri"/>
+                <a:cs typeface="Calibri"/>
+                <a:sym typeface="Calibri"/>
+              </a:defRPr>
+            </a:lvl5pPr>
+            <a:lvl6pPr marL="0" marR="0" lvl="5" indent="0" algn="r" rtl="0">
+              <a:lnSpc>
+                <a:spcPct val="100000"/>
+              </a:lnSpc>
+              <a:spcBef>
+                <a:spcPts val="0"/>
+              </a:spcBef>
+              <a:spcAft>
+                <a:spcPts val="0"/>
+              </a:spcAft>
+              <a:buClr>
+                <a:srgbClr val="000000"/>
+              </a:buClr>
+              <a:buFont typeface="Arial"/>
+              <a:buNone/>
+              <a:defRPr sz="1200" b="0" i="0" u="none" strike="noStrike" cap="none">
+                <a:solidFill>
+                  <a:srgbClr val="888888"/>
+                </a:solidFill>
+                <a:latin typeface="Calibri"/>
+                <a:ea typeface="Calibri"/>
+                <a:cs typeface="Calibri"/>
+                <a:sym typeface="Calibri"/>
+              </a:defRPr>
+            </a:lvl6pPr>
+            <a:lvl7pPr marL="0" marR="0" lvl="6" indent="0" algn="r" rtl="0">
+              <a:lnSpc>
+                <a:spcPct val="100000"/>
+              </a:lnSpc>
+              <a:spcBef>
+                <a:spcPts val="0"/>
+              </a:spcBef>
+              <a:spcAft>
+                <a:spcPts val="0"/>
+              </a:spcAft>
+              <a:buClr>
+                <a:srgbClr val="000000"/>
+              </a:buClr>
+              <a:buFont typeface="Arial"/>
+              <a:buNone/>
+              <a:defRPr sz="1200" b="0" i="0" u="none" strike="noStrike" cap="none">
+                <a:solidFill>
+                  <a:srgbClr val="888888"/>
+                </a:solidFill>
+                <a:latin typeface="Calibri"/>
+                <a:ea typeface="Calibri"/>
+                <a:cs typeface="Calibri"/>
+                <a:sym typeface="Calibri"/>
+              </a:defRPr>
+            </a:lvl7pPr>
+            <a:lvl8pPr marL="0" marR="0" lvl="7" indent="0" algn="r" rtl="0">
+              <a:lnSpc>
+                <a:spcPct val="100000"/>
+              </a:lnSpc>
+              <a:spcBef>
+                <a:spcPts val="0"/>
+              </a:spcBef>
+              <a:spcAft>
+                <a:spcPts val="0"/>
+              </a:spcAft>
+              <a:buClr>
+                <a:srgbClr val="000000"/>
+              </a:buClr>
+              <a:buFont typeface="Arial"/>
+              <a:buNone/>
+              <a:defRPr sz="1200" b="0" i="0" u="none" strike="noStrike" cap="none">
+                <a:solidFill>
+                  <a:srgbClr val="888888"/>
+                </a:solidFill>
+                <a:latin typeface="Calibri"/>
+                <a:ea typeface="Calibri"/>
+                <a:cs typeface="Calibri"/>
+                <a:sym typeface="Calibri"/>
+              </a:defRPr>
+            </a:lvl8pPr>
+            <a:lvl9pPr marL="0" marR="0" lvl="8" indent="0" algn="r" rtl="0">
+              <a:lnSpc>
+                <a:spcPct val="100000"/>
+              </a:lnSpc>
+              <a:spcBef>
+                <a:spcPts val="0"/>
+              </a:spcBef>
+              <a:spcAft>
+                <a:spcPts val="0"/>
+              </a:spcAft>
+              <a:buClr>
+                <a:srgbClr val="000000"/>
+              </a:buClr>
+              <a:buFont typeface="Arial"/>
+              <a:buNone/>
+              <a:defRPr sz="1200" b="0" i="0" u="none" strike="noStrike" cap="none">
+                <a:solidFill>
+                  <a:srgbClr val="888888"/>
+                </a:solidFill>
+                <a:latin typeface="Calibri"/>
+                <a:ea typeface="Calibri"/>
+                <a:cs typeface="Calibri"/>
+                <a:sym typeface="Calibri"/>
+              </a:defRPr>
+            </a:lvl9pPr>
+          </a:lstStyle>
+          <a:p>
+            <a:fld id="{00000000-1234-1234-1234-123412341234}" type="slidenum">
+              <a:rPr lang="en-US" smtClean="0"/>
+              <a:pPr/>
+              <a:t>19</a:t>
+            </a:fld>
+            <a:endParaRPr lang="en-US" dirty="0"/>
+          </a:p>
+        </p:txBody>
+      </p:sp>
     </p:spTree>
   </p:cSld>
   <p:clrMapOvr>
@@ -22949,6 +24824,49 @@
           </a:ln>
         </p:spPr>
       </p:pic>
+      <p:sp>
+        <p:nvSpPr>
+          <p:cNvPr id="3" name="מציין מיקום של מספר שקופית 2">
+            <a:extLst>
+              <a:ext uri="{FF2B5EF4-FFF2-40B4-BE49-F238E27FC236}">
+                <a16:creationId xmlns:a16="http://schemas.microsoft.com/office/drawing/2014/main" id="{B21E5A17-E6BB-FBD5-CC2F-1B95EBA82C5F}"/>
+              </a:ext>
+            </a:extLst>
+          </p:cNvPr>
+          <p:cNvSpPr>
+            <a:spLocks noGrp="1"/>
+          </p:cNvSpPr>
+          <p:nvPr>
+            <p:ph type="sldNum" idx="12"/>
+          </p:nvPr>
+        </p:nvSpPr>
+        <p:spPr>
+          <a:xfrm>
+            <a:off x="9949543" y="6286500"/>
+            <a:ext cx="2133600" cy="365125"/>
+          </a:xfrm>
+        </p:spPr>
+        <p:txBody>
+          <a:bodyPr/>
+          <a:lstStyle/>
+          <a:p>
+            <a:pPr marL="0" lvl="0" indent="0" algn="r" rtl="0">
+              <a:spcBef>
+                <a:spcPts val="0"/>
+              </a:spcBef>
+              <a:spcAft>
+                <a:spcPts val="0"/>
+              </a:spcAft>
+              <a:buNone/>
+            </a:pPr>
+            <a:fld id="{00000000-1234-1234-1234-123412341234}" type="slidenum">
+              <a:rPr lang="en-US" smtClean="0"/>
+              <a:t>2</a:t>
+            </a:fld>
+            <a:endParaRPr lang="en-US" dirty="0"/>
+          </a:p>
+        </p:txBody>
+      </p:sp>
     </p:spTree>
   </p:cSld>
   <p:clrMapOvr>
@@ -23485,6 +25403,44 @@
           </a:prstGeom>
         </p:spPr>
       </p:pic>
+      <p:sp>
+        <p:nvSpPr>
+          <p:cNvPr id="3" name="מציין מיקום של מספר שקופית 2">
+            <a:extLst>
+              <a:ext uri="{FF2B5EF4-FFF2-40B4-BE49-F238E27FC236}">
+                <a16:creationId xmlns:a16="http://schemas.microsoft.com/office/drawing/2014/main" id="{BC92507D-EEBF-6946-91A3-36C0A863D5D7}"/>
+              </a:ext>
+            </a:extLst>
+          </p:cNvPr>
+          <p:cNvSpPr>
+            <a:spLocks noGrp="1"/>
+          </p:cNvSpPr>
+          <p:nvPr>
+            <p:ph type="sldNum" idx="12"/>
+          </p:nvPr>
+        </p:nvSpPr>
+        <p:spPr/>
+        <p:txBody>
+          <a:bodyPr/>
+          <a:lstStyle/>
+          <a:p>
+            <a:pPr marL="0" lvl="0" indent="0" algn="r" rtl="0">
+              <a:spcBef>
+                <a:spcPts val="0"/>
+              </a:spcBef>
+              <a:spcAft>
+                <a:spcPts val="0"/>
+              </a:spcAft>
+              <a:buNone/>
+            </a:pPr>
+            <a:fld id="{00000000-1234-1234-1234-123412341234}" type="slidenum">
+              <a:rPr lang="en-US" smtClean="0"/>
+              <a:t>20</a:t>
+            </a:fld>
+            <a:endParaRPr lang="en-US"/>
+          </a:p>
+        </p:txBody>
+      </p:sp>
     </p:spTree>
   </p:cSld>
   <p:clrMapOvr>
@@ -23978,6 +25934,285 @@
           </a:prstGeom>
         </p:spPr>
       </p:pic>
+      <p:sp>
+        <p:nvSpPr>
+          <p:cNvPr id="6" name="מציין מיקום של מספר שקופית 2">
+            <a:extLst>
+              <a:ext uri="{FF2B5EF4-FFF2-40B4-BE49-F238E27FC236}">
+                <a16:creationId xmlns:a16="http://schemas.microsoft.com/office/drawing/2014/main" id="{9D64B399-05C9-38CE-4926-FF8FDCD49CE4}"/>
+              </a:ext>
+            </a:extLst>
+          </p:cNvPr>
+          <p:cNvSpPr txBox="1">
+            <a:spLocks/>
+          </p:cNvSpPr>
+          <p:nvPr/>
+        </p:nvSpPr>
+        <p:spPr>
+          <a:xfrm>
+            <a:off x="9972261" y="6387430"/>
+            <a:ext cx="2133600" cy="365125"/>
+          </a:xfrm>
+          <a:prstGeom prst="rect">
+            <a:avLst/>
+          </a:prstGeom>
+          <a:noFill/>
+          <a:ln>
+            <a:noFill/>
+          </a:ln>
+        </p:spPr>
+        <p:txBody>
+          <a:bodyPr spcFirstLastPara="1" wrap="square" lIns="91425" tIns="45700" rIns="91425" bIns="45700" anchor="ctr" anchorCtr="0">
+            <a:noAutofit/>
+          </a:bodyPr>
+          <a:lstStyle>
+            <a:defPPr marR="0" lvl="0" algn="l" rtl="0">
+              <a:lnSpc>
+                <a:spcPct val="100000"/>
+              </a:lnSpc>
+              <a:spcBef>
+                <a:spcPts val="0"/>
+              </a:spcBef>
+              <a:spcAft>
+                <a:spcPts val="0"/>
+              </a:spcAft>
+            </a:defPPr>
+            <a:lvl1pPr marL="0" marR="0" lvl="0" indent="0" algn="r" rtl="0">
+              <a:lnSpc>
+                <a:spcPct val="100000"/>
+              </a:lnSpc>
+              <a:spcBef>
+                <a:spcPts val="0"/>
+              </a:spcBef>
+              <a:spcAft>
+                <a:spcPts val="0"/>
+              </a:spcAft>
+              <a:buClr>
+                <a:srgbClr val="000000"/>
+              </a:buClr>
+              <a:buFont typeface="Arial"/>
+              <a:buNone/>
+              <a:defRPr sz="1200" b="0" i="0" u="none" strike="noStrike" cap="none">
+                <a:solidFill>
+                  <a:srgbClr val="888888"/>
+                </a:solidFill>
+                <a:latin typeface="Calibri"/>
+                <a:ea typeface="Calibri"/>
+                <a:cs typeface="Calibri"/>
+                <a:sym typeface="Calibri"/>
+              </a:defRPr>
+            </a:lvl1pPr>
+            <a:lvl2pPr marL="0" marR="0" lvl="1" indent="0" algn="r" rtl="0">
+              <a:lnSpc>
+                <a:spcPct val="100000"/>
+              </a:lnSpc>
+              <a:spcBef>
+                <a:spcPts val="0"/>
+              </a:spcBef>
+              <a:spcAft>
+                <a:spcPts val="0"/>
+              </a:spcAft>
+              <a:buClr>
+                <a:srgbClr val="000000"/>
+              </a:buClr>
+              <a:buFont typeface="Arial"/>
+              <a:buNone/>
+              <a:defRPr sz="1200" b="0" i="0" u="none" strike="noStrike" cap="none">
+                <a:solidFill>
+                  <a:srgbClr val="888888"/>
+                </a:solidFill>
+                <a:latin typeface="Calibri"/>
+                <a:ea typeface="Calibri"/>
+                <a:cs typeface="Calibri"/>
+                <a:sym typeface="Calibri"/>
+              </a:defRPr>
+            </a:lvl2pPr>
+            <a:lvl3pPr marL="0" marR="0" lvl="2" indent="0" algn="r" rtl="0">
+              <a:lnSpc>
+                <a:spcPct val="100000"/>
+              </a:lnSpc>
+              <a:spcBef>
+                <a:spcPts val="0"/>
+              </a:spcBef>
+              <a:spcAft>
+                <a:spcPts val="0"/>
+              </a:spcAft>
+              <a:buClr>
+                <a:srgbClr val="000000"/>
+              </a:buClr>
+              <a:buFont typeface="Arial"/>
+              <a:buNone/>
+              <a:defRPr sz="1200" b="0" i="0" u="none" strike="noStrike" cap="none">
+                <a:solidFill>
+                  <a:srgbClr val="888888"/>
+                </a:solidFill>
+                <a:latin typeface="Calibri"/>
+                <a:ea typeface="Calibri"/>
+                <a:cs typeface="Calibri"/>
+                <a:sym typeface="Calibri"/>
+              </a:defRPr>
+            </a:lvl3pPr>
+            <a:lvl4pPr marL="0" marR="0" lvl="3" indent="0" algn="r" rtl="0">
+              <a:lnSpc>
+                <a:spcPct val="100000"/>
+              </a:lnSpc>
+              <a:spcBef>
+                <a:spcPts val="0"/>
+              </a:spcBef>
+              <a:spcAft>
+                <a:spcPts val="0"/>
+              </a:spcAft>
+              <a:buClr>
+                <a:srgbClr val="000000"/>
+              </a:buClr>
+              <a:buFont typeface="Arial"/>
+              <a:buNone/>
+              <a:defRPr sz="1200" b="0" i="0" u="none" strike="noStrike" cap="none">
+                <a:solidFill>
+                  <a:srgbClr val="888888"/>
+                </a:solidFill>
+                <a:latin typeface="Calibri"/>
+                <a:ea typeface="Calibri"/>
+                <a:cs typeface="Calibri"/>
+                <a:sym typeface="Calibri"/>
+              </a:defRPr>
+            </a:lvl4pPr>
+            <a:lvl5pPr marL="0" marR="0" lvl="4" indent="0" algn="r" rtl="0">
+              <a:lnSpc>
+                <a:spcPct val="100000"/>
+              </a:lnSpc>
+              <a:spcBef>
+                <a:spcPts val="0"/>
+              </a:spcBef>
+              <a:spcAft>
+                <a:spcPts val="0"/>
+              </a:spcAft>
+              <a:buClr>
+                <a:srgbClr val="000000"/>
+              </a:buClr>
+              <a:buFont typeface="Arial"/>
+              <a:buNone/>
+              <a:defRPr sz="1200" b="0" i="0" u="none" strike="noStrike" cap="none">
+                <a:solidFill>
+                  <a:srgbClr val="888888"/>
+                </a:solidFill>
+                <a:latin typeface="Calibri"/>
+                <a:ea typeface="Calibri"/>
+                <a:cs typeface="Calibri"/>
+                <a:sym typeface="Calibri"/>
+              </a:defRPr>
+            </a:lvl5pPr>
+            <a:lvl6pPr marL="0" marR="0" lvl="5" indent="0" algn="r" rtl="0">
+              <a:lnSpc>
+                <a:spcPct val="100000"/>
+              </a:lnSpc>
+              <a:spcBef>
+                <a:spcPts val="0"/>
+              </a:spcBef>
+              <a:spcAft>
+                <a:spcPts val="0"/>
+              </a:spcAft>
+              <a:buClr>
+                <a:srgbClr val="000000"/>
+              </a:buClr>
+              <a:buFont typeface="Arial"/>
+              <a:buNone/>
+              <a:defRPr sz="1200" b="0" i="0" u="none" strike="noStrike" cap="none">
+                <a:solidFill>
+                  <a:srgbClr val="888888"/>
+                </a:solidFill>
+                <a:latin typeface="Calibri"/>
+                <a:ea typeface="Calibri"/>
+                <a:cs typeface="Calibri"/>
+                <a:sym typeface="Calibri"/>
+              </a:defRPr>
+            </a:lvl6pPr>
+            <a:lvl7pPr marL="0" marR="0" lvl="6" indent="0" algn="r" rtl="0">
+              <a:lnSpc>
+                <a:spcPct val="100000"/>
+              </a:lnSpc>
+              <a:spcBef>
+                <a:spcPts val="0"/>
+              </a:spcBef>
+              <a:spcAft>
+                <a:spcPts val="0"/>
+              </a:spcAft>
+              <a:buClr>
+                <a:srgbClr val="000000"/>
+              </a:buClr>
+              <a:buFont typeface="Arial"/>
+              <a:buNone/>
+              <a:defRPr sz="1200" b="0" i="0" u="none" strike="noStrike" cap="none">
+                <a:solidFill>
+                  <a:srgbClr val="888888"/>
+                </a:solidFill>
+                <a:latin typeface="Calibri"/>
+                <a:ea typeface="Calibri"/>
+                <a:cs typeface="Calibri"/>
+                <a:sym typeface="Calibri"/>
+              </a:defRPr>
+            </a:lvl7pPr>
+            <a:lvl8pPr marL="0" marR="0" lvl="7" indent="0" algn="r" rtl="0">
+              <a:lnSpc>
+                <a:spcPct val="100000"/>
+              </a:lnSpc>
+              <a:spcBef>
+                <a:spcPts val="0"/>
+              </a:spcBef>
+              <a:spcAft>
+                <a:spcPts val="0"/>
+              </a:spcAft>
+              <a:buClr>
+                <a:srgbClr val="000000"/>
+              </a:buClr>
+              <a:buFont typeface="Arial"/>
+              <a:buNone/>
+              <a:defRPr sz="1200" b="0" i="0" u="none" strike="noStrike" cap="none">
+                <a:solidFill>
+                  <a:srgbClr val="888888"/>
+                </a:solidFill>
+                <a:latin typeface="Calibri"/>
+                <a:ea typeface="Calibri"/>
+                <a:cs typeface="Calibri"/>
+                <a:sym typeface="Calibri"/>
+              </a:defRPr>
+            </a:lvl8pPr>
+            <a:lvl9pPr marL="0" marR="0" lvl="8" indent="0" algn="r" rtl="0">
+              <a:lnSpc>
+                <a:spcPct val="100000"/>
+              </a:lnSpc>
+              <a:spcBef>
+                <a:spcPts val="0"/>
+              </a:spcBef>
+              <a:spcAft>
+                <a:spcPts val="0"/>
+              </a:spcAft>
+              <a:buClr>
+                <a:srgbClr val="000000"/>
+              </a:buClr>
+              <a:buFont typeface="Arial"/>
+              <a:buNone/>
+              <a:defRPr sz="1200" b="0" i="0" u="none" strike="noStrike" cap="none">
+                <a:solidFill>
+                  <a:srgbClr val="888888"/>
+                </a:solidFill>
+                <a:latin typeface="Calibri"/>
+                <a:ea typeface="Calibri"/>
+                <a:cs typeface="Calibri"/>
+                <a:sym typeface="Calibri"/>
+              </a:defRPr>
+            </a:lvl9pPr>
+          </a:lstStyle>
+          <a:p>
+            <a:fld id="{00000000-1234-1234-1234-123412341234}" type="slidenum">
+              <a:rPr lang="en-US" smtClean="0"/>
+              <a:pPr/>
+              <a:t>21</a:t>
+            </a:fld>
+            <a:endParaRPr lang="en-US" dirty="0"/>
+          </a:p>
+        </p:txBody>
+      </p:sp>
     </p:spTree>
   </p:cSld>
   <p:clrMapOvr>
@@ -24696,6 +26931,285 @@
           </a:prstGeom>
         </p:spPr>
       </p:pic>
+      <p:sp>
+        <p:nvSpPr>
+          <p:cNvPr id="8" name="מציין מיקום של מספר שקופית 2">
+            <a:extLst>
+              <a:ext uri="{FF2B5EF4-FFF2-40B4-BE49-F238E27FC236}">
+                <a16:creationId xmlns:a16="http://schemas.microsoft.com/office/drawing/2014/main" id="{76927596-D514-DB2C-EFF3-F181E7E0CFE8}"/>
+              </a:ext>
+            </a:extLst>
+          </p:cNvPr>
+          <p:cNvSpPr txBox="1">
+            <a:spLocks/>
+          </p:cNvSpPr>
+          <p:nvPr/>
+        </p:nvSpPr>
+        <p:spPr>
+          <a:xfrm>
+            <a:off x="9972261" y="6387430"/>
+            <a:ext cx="2133600" cy="365125"/>
+          </a:xfrm>
+          <a:prstGeom prst="rect">
+            <a:avLst/>
+          </a:prstGeom>
+          <a:noFill/>
+          <a:ln>
+            <a:noFill/>
+          </a:ln>
+        </p:spPr>
+        <p:txBody>
+          <a:bodyPr spcFirstLastPara="1" wrap="square" lIns="91425" tIns="45700" rIns="91425" bIns="45700" anchor="ctr" anchorCtr="0">
+            <a:noAutofit/>
+          </a:bodyPr>
+          <a:lstStyle>
+            <a:defPPr marR="0" lvl="0" algn="l" rtl="0">
+              <a:lnSpc>
+                <a:spcPct val="100000"/>
+              </a:lnSpc>
+              <a:spcBef>
+                <a:spcPts val="0"/>
+              </a:spcBef>
+              <a:spcAft>
+                <a:spcPts val="0"/>
+              </a:spcAft>
+            </a:defPPr>
+            <a:lvl1pPr marL="0" marR="0" lvl="0" indent="0" algn="r" rtl="0">
+              <a:lnSpc>
+                <a:spcPct val="100000"/>
+              </a:lnSpc>
+              <a:spcBef>
+                <a:spcPts val="0"/>
+              </a:spcBef>
+              <a:spcAft>
+                <a:spcPts val="0"/>
+              </a:spcAft>
+              <a:buClr>
+                <a:srgbClr val="000000"/>
+              </a:buClr>
+              <a:buFont typeface="Arial"/>
+              <a:buNone/>
+              <a:defRPr sz="1200" b="0" i="0" u="none" strike="noStrike" cap="none">
+                <a:solidFill>
+                  <a:srgbClr val="888888"/>
+                </a:solidFill>
+                <a:latin typeface="Calibri"/>
+                <a:ea typeface="Calibri"/>
+                <a:cs typeface="Calibri"/>
+                <a:sym typeface="Calibri"/>
+              </a:defRPr>
+            </a:lvl1pPr>
+            <a:lvl2pPr marL="0" marR="0" lvl="1" indent="0" algn="r" rtl="0">
+              <a:lnSpc>
+                <a:spcPct val="100000"/>
+              </a:lnSpc>
+              <a:spcBef>
+                <a:spcPts val="0"/>
+              </a:spcBef>
+              <a:spcAft>
+                <a:spcPts val="0"/>
+              </a:spcAft>
+              <a:buClr>
+                <a:srgbClr val="000000"/>
+              </a:buClr>
+              <a:buFont typeface="Arial"/>
+              <a:buNone/>
+              <a:defRPr sz="1200" b="0" i="0" u="none" strike="noStrike" cap="none">
+                <a:solidFill>
+                  <a:srgbClr val="888888"/>
+                </a:solidFill>
+                <a:latin typeface="Calibri"/>
+                <a:ea typeface="Calibri"/>
+                <a:cs typeface="Calibri"/>
+                <a:sym typeface="Calibri"/>
+              </a:defRPr>
+            </a:lvl2pPr>
+            <a:lvl3pPr marL="0" marR="0" lvl="2" indent="0" algn="r" rtl="0">
+              <a:lnSpc>
+                <a:spcPct val="100000"/>
+              </a:lnSpc>
+              <a:spcBef>
+                <a:spcPts val="0"/>
+              </a:spcBef>
+              <a:spcAft>
+                <a:spcPts val="0"/>
+              </a:spcAft>
+              <a:buClr>
+                <a:srgbClr val="000000"/>
+              </a:buClr>
+              <a:buFont typeface="Arial"/>
+              <a:buNone/>
+              <a:defRPr sz="1200" b="0" i="0" u="none" strike="noStrike" cap="none">
+                <a:solidFill>
+                  <a:srgbClr val="888888"/>
+                </a:solidFill>
+                <a:latin typeface="Calibri"/>
+                <a:ea typeface="Calibri"/>
+                <a:cs typeface="Calibri"/>
+                <a:sym typeface="Calibri"/>
+              </a:defRPr>
+            </a:lvl3pPr>
+            <a:lvl4pPr marL="0" marR="0" lvl="3" indent="0" algn="r" rtl="0">
+              <a:lnSpc>
+                <a:spcPct val="100000"/>
+              </a:lnSpc>
+              <a:spcBef>
+                <a:spcPts val="0"/>
+              </a:spcBef>
+              <a:spcAft>
+                <a:spcPts val="0"/>
+              </a:spcAft>
+              <a:buClr>
+                <a:srgbClr val="000000"/>
+              </a:buClr>
+              <a:buFont typeface="Arial"/>
+              <a:buNone/>
+              <a:defRPr sz="1200" b="0" i="0" u="none" strike="noStrike" cap="none">
+                <a:solidFill>
+                  <a:srgbClr val="888888"/>
+                </a:solidFill>
+                <a:latin typeface="Calibri"/>
+                <a:ea typeface="Calibri"/>
+                <a:cs typeface="Calibri"/>
+                <a:sym typeface="Calibri"/>
+              </a:defRPr>
+            </a:lvl4pPr>
+            <a:lvl5pPr marL="0" marR="0" lvl="4" indent="0" algn="r" rtl="0">
+              <a:lnSpc>
+                <a:spcPct val="100000"/>
+              </a:lnSpc>
+              <a:spcBef>
+                <a:spcPts val="0"/>
+              </a:spcBef>
+              <a:spcAft>
+                <a:spcPts val="0"/>
+              </a:spcAft>
+              <a:buClr>
+                <a:srgbClr val="000000"/>
+              </a:buClr>
+              <a:buFont typeface="Arial"/>
+              <a:buNone/>
+              <a:defRPr sz="1200" b="0" i="0" u="none" strike="noStrike" cap="none">
+                <a:solidFill>
+                  <a:srgbClr val="888888"/>
+                </a:solidFill>
+                <a:latin typeface="Calibri"/>
+                <a:ea typeface="Calibri"/>
+                <a:cs typeface="Calibri"/>
+                <a:sym typeface="Calibri"/>
+              </a:defRPr>
+            </a:lvl5pPr>
+            <a:lvl6pPr marL="0" marR="0" lvl="5" indent="0" algn="r" rtl="0">
+              <a:lnSpc>
+                <a:spcPct val="100000"/>
+              </a:lnSpc>
+              <a:spcBef>
+                <a:spcPts val="0"/>
+              </a:spcBef>
+              <a:spcAft>
+                <a:spcPts val="0"/>
+              </a:spcAft>
+              <a:buClr>
+                <a:srgbClr val="000000"/>
+              </a:buClr>
+              <a:buFont typeface="Arial"/>
+              <a:buNone/>
+              <a:defRPr sz="1200" b="0" i="0" u="none" strike="noStrike" cap="none">
+                <a:solidFill>
+                  <a:srgbClr val="888888"/>
+                </a:solidFill>
+                <a:latin typeface="Calibri"/>
+                <a:ea typeface="Calibri"/>
+                <a:cs typeface="Calibri"/>
+                <a:sym typeface="Calibri"/>
+              </a:defRPr>
+            </a:lvl6pPr>
+            <a:lvl7pPr marL="0" marR="0" lvl="6" indent="0" algn="r" rtl="0">
+              <a:lnSpc>
+                <a:spcPct val="100000"/>
+              </a:lnSpc>
+              <a:spcBef>
+                <a:spcPts val="0"/>
+              </a:spcBef>
+              <a:spcAft>
+                <a:spcPts val="0"/>
+              </a:spcAft>
+              <a:buClr>
+                <a:srgbClr val="000000"/>
+              </a:buClr>
+              <a:buFont typeface="Arial"/>
+              <a:buNone/>
+              <a:defRPr sz="1200" b="0" i="0" u="none" strike="noStrike" cap="none">
+                <a:solidFill>
+                  <a:srgbClr val="888888"/>
+                </a:solidFill>
+                <a:latin typeface="Calibri"/>
+                <a:ea typeface="Calibri"/>
+                <a:cs typeface="Calibri"/>
+                <a:sym typeface="Calibri"/>
+              </a:defRPr>
+            </a:lvl7pPr>
+            <a:lvl8pPr marL="0" marR="0" lvl="7" indent="0" algn="r" rtl="0">
+              <a:lnSpc>
+                <a:spcPct val="100000"/>
+              </a:lnSpc>
+              <a:spcBef>
+                <a:spcPts val="0"/>
+              </a:spcBef>
+              <a:spcAft>
+                <a:spcPts val="0"/>
+              </a:spcAft>
+              <a:buClr>
+                <a:srgbClr val="000000"/>
+              </a:buClr>
+              <a:buFont typeface="Arial"/>
+              <a:buNone/>
+              <a:defRPr sz="1200" b="0" i="0" u="none" strike="noStrike" cap="none">
+                <a:solidFill>
+                  <a:srgbClr val="888888"/>
+                </a:solidFill>
+                <a:latin typeface="Calibri"/>
+                <a:ea typeface="Calibri"/>
+                <a:cs typeface="Calibri"/>
+                <a:sym typeface="Calibri"/>
+              </a:defRPr>
+            </a:lvl8pPr>
+            <a:lvl9pPr marL="0" marR="0" lvl="8" indent="0" algn="r" rtl="0">
+              <a:lnSpc>
+                <a:spcPct val="100000"/>
+              </a:lnSpc>
+              <a:spcBef>
+                <a:spcPts val="0"/>
+              </a:spcBef>
+              <a:spcAft>
+                <a:spcPts val="0"/>
+              </a:spcAft>
+              <a:buClr>
+                <a:srgbClr val="000000"/>
+              </a:buClr>
+              <a:buFont typeface="Arial"/>
+              <a:buNone/>
+              <a:defRPr sz="1200" b="0" i="0" u="none" strike="noStrike" cap="none">
+                <a:solidFill>
+                  <a:srgbClr val="888888"/>
+                </a:solidFill>
+                <a:latin typeface="Calibri"/>
+                <a:ea typeface="Calibri"/>
+                <a:cs typeface="Calibri"/>
+                <a:sym typeface="Calibri"/>
+              </a:defRPr>
+            </a:lvl9pPr>
+          </a:lstStyle>
+          <a:p>
+            <a:fld id="{00000000-1234-1234-1234-123412341234}" type="slidenum">
+              <a:rPr lang="en-US" smtClean="0"/>
+              <a:pPr/>
+              <a:t>22</a:t>
+            </a:fld>
+            <a:endParaRPr lang="en-US" dirty="0"/>
+          </a:p>
+        </p:txBody>
+      </p:sp>
     </p:spTree>
   </p:cSld>
   <p:clrMapOvr>
@@ -25307,6 +27821,285 @@
           </a:prstGeom>
         </p:spPr>
       </p:pic>
+      <p:sp>
+        <p:nvSpPr>
+          <p:cNvPr id="8" name="מציין מיקום של מספר שקופית 2">
+            <a:extLst>
+              <a:ext uri="{FF2B5EF4-FFF2-40B4-BE49-F238E27FC236}">
+                <a16:creationId xmlns:a16="http://schemas.microsoft.com/office/drawing/2014/main" id="{3EDBF047-FF63-42A4-DF26-57DF9BBDF060}"/>
+              </a:ext>
+            </a:extLst>
+          </p:cNvPr>
+          <p:cNvSpPr txBox="1">
+            <a:spLocks/>
+          </p:cNvSpPr>
+          <p:nvPr/>
+        </p:nvSpPr>
+        <p:spPr>
+          <a:xfrm>
+            <a:off x="9972261" y="6381750"/>
+            <a:ext cx="2133600" cy="365125"/>
+          </a:xfrm>
+          <a:prstGeom prst="rect">
+            <a:avLst/>
+          </a:prstGeom>
+          <a:noFill/>
+          <a:ln>
+            <a:noFill/>
+          </a:ln>
+        </p:spPr>
+        <p:txBody>
+          <a:bodyPr spcFirstLastPara="1" wrap="square" lIns="91425" tIns="45700" rIns="91425" bIns="45700" anchor="ctr" anchorCtr="0">
+            <a:noAutofit/>
+          </a:bodyPr>
+          <a:lstStyle>
+            <a:defPPr marR="0" lvl="0" algn="l" rtl="0">
+              <a:lnSpc>
+                <a:spcPct val="100000"/>
+              </a:lnSpc>
+              <a:spcBef>
+                <a:spcPts val="0"/>
+              </a:spcBef>
+              <a:spcAft>
+                <a:spcPts val="0"/>
+              </a:spcAft>
+            </a:defPPr>
+            <a:lvl1pPr marL="0" marR="0" lvl="0" indent="0" algn="r" rtl="0">
+              <a:lnSpc>
+                <a:spcPct val="100000"/>
+              </a:lnSpc>
+              <a:spcBef>
+                <a:spcPts val="0"/>
+              </a:spcBef>
+              <a:spcAft>
+                <a:spcPts val="0"/>
+              </a:spcAft>
+              <a:buClr>
+                <a:srgbClr val="000000"/>
+              </a:buClr>
+              <a:buFont typeface="Arial"/>
+              <a:buNone/>
+              <a:defRPr sz="1200" b="0" i="0" u="none" strike="noStrike" cap="none">
+                <a:solidFill>
+                  <a:srgbClr val="888888"/>
+                </a:solidFill>
+                <a:latin typeface="Calibri"/>
+                <a:ea typeface="Calibri"/>
+                <a:cs typeface="Calibri"/>
+                <a:sym typeface="Calibri"/>
+              </a:defRPr>
+            </a:lvl1pPr>
+            <a:lvl2pPr marL="0" marR="0" lvl="1" indent="0" algn="r" rtl="0">
+              <a:lnSpc>
+                <a:spcPct val="100000"/>
+              </a:lnSpc>
+              <a:spcBef>
+                <a:spcPts val="0"/>
+              </a:spcBef>
+              <a:spcAft>
+                <a:spcPts val="0"/>
+              </a:spcAft>
+              <a:buClr>
+                <a:srgbClr val="000000"/>
+              </a:buClr>
+              <a:buFont typeface="Arial"/>
+              <a:buNone/>
+              <a:defRPr sz="1200" b="0" i="0" u="none" strike="noStrike" cap="none">
+                <a:solidFill>
+                  <a:srgbClr val="888888"/>
+                </a:solidFill>
+                <a:latin typeface="Calibri"/>
+                <a:ea typeface="Calibri"/>
+                <a:cs typeface="Calibri"/>
+                <a:sym typeface="Calibri"/>
+              </a:defRPr>
+            </a:lvl2pPr>
+            <a:lvl3pPr marL="0" marR="0" lvl="2" indent="0" algn="r" rtl="0">
+              <a:lnSpc>
+                <a:spcPct val="100000"/>
+              </a:lnSpc>
+              <a:spcBef>
+                <a:spcPts val="0"/>
+              </a:spcBef>
+              <a:spcAft>
+                <a:spcPts val="0"/>
+              </a:spcAft>
+              <a:buClr>
+                <a:srgbClr val="000000"/>
+              </a:buClr>
+              <a:buFont typeface="Arial"/>
+              <a:buNone/>
+              <a:defRPr sz="1200" b="0" i="0" u="none" strike="noStrike" cap="none">
+                <a:solidFill>
+                  <a:srgbClr val="888888"/>
+                </a:solidFill>
+                <a:latin typeface="Calibri"/>
+                <a:ea typeface="Calibri"/>
+                <a:cs typeface="Calibri"/>
+                <a:sym typeface="Calibri"/>
+              </a:defRPr>
+            </a:lvl3pPr>
+            <a:lvl4pPr marL="0" marR="0" lvl="3" indent="0" algn="r" rtl="0">
+              <a:lnSpc>
+                <a:spcPct val="100000"/>
+              </a:lnSpc>
+              <a:spcBef>
+                <a:spcPts val="0"/>
+              </a:spcBef>
+              <a:spcAft>
+                <a:spcPts val="0"/>
+              </a:spcAft>
+              <a:buClr>
+                <a:srgbClr val="000000"/>
+              </a:buClr>
+              <a:buFont typeface="Arial"/>
+              <a:buNone/>
+              <a:defRPr sz="1200" b="0" i="0" u="none" strike="noStrike" cap="none">
+                <a:solidFill>
+                  <a:srgbClr val="888888"/>
+                </a:solidFill>
+                <a:latin typeface="Calibri"/>
+                <a:ea typeface="Calibri"/>
+                <a:cs typeface="Calibri"/>
+                <a:sym typeface="Calibri"/>
+              </a:defRPr>
+            </a:lvl4pPr>
+            <a:lvl5pPr marL="0" marR="0" lvl="4" indent="0" algn="r" rtl="0">
+              <a:lnSpc>
+                <a:spcPct val="100000"/>
+              </a:lnSpc>
+              <a:spcBef>
+                <a:spcPts val="0"/>
+              </a:spcBef>
+              <a:spcAft>
+                <a:spcPts val="0"/>
+              </a:spcAft>
+              <a:buClr>
+                <a:srgbClr val="000000"/>
+              </a:buClr>
+              <a:buFont typeface="Arial"/>
+              <a:buNone/>
+              <a:defRPr sz="1200" b="0" i="0" u="none" strike="noStrike" cap="none">
+                <a:solidFill>
+                  <a:srgbClr val="888888"/>
+                </a:solidFill>
+                <a:latin typeface="Calibri"/>
+                <a:ea typeface="Calibri"/>
+                <a:cs typeface="Calibri"/>
+                <a:sym typeface="Calibri"/>
+              </a:defRPr>
+            </a:lvl5pPr>
+            <a:lvl6pPr marL="0" marR="0" lvl="5" indent="0" algn="r" rtl="0">
+              <a:lnSpc>
+                <a:spcPct val="100000"/>
+              </a:lnSpc>
+              <a:spcBef>
+                <a:spcPts val="0"/>
+              </a:spcBef>
+              <a:spcAft>
+                <a:spcPts val="0"/>
+              </a:spcAft>
+              <a:buClr>
+                <a:srgbClr val="000000"/>
+              </a:buClr>
+              <a:buFont typeface="Arial"/>
+              <a:buNone/>
+              <a:defRPr sz="1200" b="0" i="0" u="none" strike="noStrike" cap="none">
+                <a:solidFill>
+                  <a:srgbClr val="888888"/>
+                </a:solidFill>
+                <a:latin typeface="Calibri"/>
+                <a:ea typeface="Calibri"/>
+                <a:cs typeface="Calibri"/>
+                <a:sym typeface="Calibri"/>
+              </a:defRPr>
+            </a:lvl6pPr>
+            <a:lvl7pPr marL="0" marR="0" lvl="6" indent="0" algn="r" rtl="0">
+              <a:lnSpc>
+                <a:spcPct val="100000"/>
+              </a:lnSpc>
+              <a:spcBef>
+                <a:spcPts val="0"/>
+              </a:spcBef>
+              <a:spcAft>
+                <a:spcPts val="0"/>
+              </a:spcAft>
+              <a:buClr>
+                <a:srgbClr val="000000"/>
+              </a:buClr>
+              <a:buFont typeface="Arial"/>
+              <a:buNone/>
+              <a:defRPr sz="1200" b="0" i="0" u="none" strike="noStrike" cap="none">
+                <a:solidFill>
+                  <a:srgbClr val="888888"/>
+                </a:solidFill>
+                <a:latin typeface="Calibri"/>
+                <a:ea typeface="Calibri"/>
+                <a:cs typeface="Calibri"/>
+                <a:sym typeface="Calibri"/>
+              </a:defRPr>
+            </a:lvl7pPr>
+            <a:lvl8pPr marL="0" marR="0" lvl="7" indent="0" algn="r" rtl="0">
+              <a:lnSpc>
+                <a:spcPct val="100000"/>
+              </a:lnSpc>
+              <a:spcBef>
+                <a:spcPts val="0"/>
+              </a:spcBef>
+              <a:spcAft>
+                <a:spcPts val="0"/>
+              </a:spcAft>
+              <a:buClr>
+                <a:srgbClr val="000000"/>
+              </a:buClr>
+              <a:buFont typeface="Arial"/>
+              <a:buNone/>
+              <a:defRPr sz="1200" b="0" i="0" u="none" strike="noStrike" cap="none">
+                <a:solidFill>
+                  <a:srgbClr val="888888"/>
+                </a:solidFill>
+                <a:latin typeface="Calibri"/>
+                <a:ea typeface="Calibri"/>
+                <a:cs typeface="Calibri"/>
+                <a:sym typeface="Calibri"/>
+              </a:defRPr>
+            </a:lvl8pPr>
+            <a:lvl9pPr marL="0" marR="0" lvl="8" indent="0" algn="r" rtl="0">
+              <a:lnSpc>
+                <a:spcPct val="100000"/>
+              </a:lnSpc>
+              <a:spcBef>
+                <a:spcPts val="0"/>
+              </a:spcBef>
+              <a:spcAft>
+                <a:spcPts val="0"/>
+              </a:spcAft>
+              <a:buClr>
+                <a:srgbClr val="000000"/>
+              </a:buClr>
+              <a:buFont typeface="Arial"/>
+              <a:buNone/>
+              <a:defRPr sz="1200" b="0" i="0" u="none" strike="noStrike" cap="none">
+                <a:solidFill>
+                  <a:srgbClr val="888888"/>
+                </a:solidFill>
+                <a:latin typeface="Calibri"/>
+                <a:ea typeface="Calibri"/>
+                <a:cs typeface="Calibri"/>
+                <a:sym typeface="Calibri"/>
+              </a:defRPr>
+            </a:lvl9pPr>
+          </a:lstStyle>
+          <a:p>
+            <a:fld id="{00000000-1234-1234-1234-123412341234}" type="slidenum">
+              <a:rPr lang="en-US" smtClean="0"/>
+              <a:pPr/>
+              <a:t>23</a:t>
+            </a:fld>
+            <a:endParaRPr lang="en-US" dirty="0"/>
+          </a:p>
+        </p:txBody>
+      </p:sp>
     </p:spTree>
     <p:extLst>
       <p:ext uri="{BB962C8B-B14F-4D97-AF65-F5344CB8AC3E}">
@@ -25981,6 +28774,285 @@
           </a:p>
         </p:txBody>
       </p:sp>
+      <p:sp>
+        <p:nvSpPr>
+          <p:cNvPr id="5" name="מציין מיקום של מספר שקופית 2">
+            <a:extLst>
+              <a:ext uri="{FF2B5EF4-FFF2-40B4-BE49-F238E27FC236}">
+                <a16:creationId xmlns:a16="http://schemas.microsoft.com/office/drawing/2014/main" id="{8B83B2F8-50B7-EB78-6C04-531E834A1387}"/>
+              </a:ext>
+            </a:extLst>
+          </p:cNvPr>
+          <p:cNvSpPr txBox="1">
+            <a:spLocks/>
+          </p:cNvSpPr>
+          <p:nvPr/>
+        </p:nvSpPr>
+        <p:spPr>
+          <a:xfrm>
+            <a:off x="9972261" y="6381750"/>
+            <a:ext cx="2133600" cy="365125"/>
+          </a:xfrm>
+          <a:prstGeom prst="rect">
+            <a:avLst/>
+          </a:prstGeom>
+          <a:noFill/>
+          <a:ln>
+            <a:noFill/>
+          </a:ln>
+        </p:spPr>
+        <p:txBody>
+          <a:bodyPr spcFirstLastPara="1" wrap="square" lIns="91425" tIns="45700" rIns="91425" bIns="45700" anchor="ctr" anchorCtr="0">
+            <a:noAutofit/>
+          </a:bodyPr>
+          <a:lstStyle>
+            <a:defPPr marR="0" lvl="0" algn="l" rtl="0">
+              <a:lnSpc>
+                <a:spcPct val="100000"/>
+              </a:lnSpc>
+              <a:spcBef>
+                <a:spcPts val="0"/>
+              </a:spcBef>
+              <a:spcAft>
+                <a:spcPts val="0"/>
+              </a:spcAft>
+            </a:defPPr>
+            <a:lvl1pPr marL="0" marR="0" lvl="0" indent="0" algn="r" rtl="0">
+              <a:lnSpc>
+                <a:spcPct val="100000"/>
+              </a:lnSpc>
+              <a:spcBef>
+                <a:spcPts val="0"/>
+              </a:spcBef>
+              <a:spcAft>
+                <a:spcPts val="0"/>
+              </a:spcAft>
+              <a:buClr>
+                <a:srgbClr val="000000"/>
+              </a:buClr>
+              <a:buFont typeface="Arial"/>
+              <a:buNone/>
+              <a:defRPr sz="1200" b="0" i="0" u="none" strike="noStrike" cap="none">
+                <a:solidFill>
+                  <a:srgbClr val="888888"/>
+                </a:solidFill>
+                <a:latin typeface="Calibri"/>
+                <a:ea typeface="Calibri"/>
+                <a:cs typeface="Calibri"/>
+                <a:sym typeface="Calibri"/>
+              </a:defRPr>
+            </a:lvl1pPr>
+            <a:lvl2pPr marL="0" marR="0" lvl="1" indent="0" algn="r" rtl="0">
+              <a:lnSpc>
+                <a:spcPct val="100000"/>
+              </a:lnSpc>
+              <a:spcBef>
+                <a:spcPts val="0"/>
+              </a:spcBef>
+              <a:spcAft>
+                <a:spcPts val="0"/>
+              </a:spcAft>
+              <a:buClr>
+                <a:srgbClr val="000000"/>
+              </a:buClr>
+              <a:buFont typeface="Arial"/>
+              <a:buNone/>
+              <a:defRPr sz="1200" b="0" i="0" u="none" strike="noStrike" cap="none">
+                <a:solidFill>
+                  <a:srgbClr val="888888"/>
+                </a:solidFill>
+                <a:latin typeface="Calibri"/>
+                <a:ea typeface="Calibri"/>
+                <a:cs typeface="Calibri"/>
+                <a:sym typeface="Calibri"/>
+              </a:defRPr>
+            </a:lvl2pPr>
+            <a:lvl3pPr marL="0" marR="0" lvl="2" indent="0" algn="r" rtl="0">
+              <a:lnSpc>
+                <a:spcPct val="100000"/>
+              </a:lnSpc>
+              <a:spcBef>
+                <a:spcPts val="0"/>
+              </a:spcBef>
+              <a:spcAft>
+                <a:spcPts val="0"/>
+              </a:spcAft>
+              <a:buClr>
+                <a:srgbClr val="000000"/>
+              </a:buClr>
+              <a:buFont typeface="Arial"/>
+              <a:buNone/>
+              <a:defRPr sz="1200" b="0" i="0" u="none" strike="noStrike" cap="none">
+                <a:solidFill>
+                  <a:srgbClr val="888888"/>
+                </a:solidFill>
+                <a:latin typeface="Calibri"/>
+                <a:ea typeface="Calibri"/>
+                <a:cs typeface="Calibri"/>
+                <a:sym typeface="Calibri"/>
+              </a:defRPr>
+            </a:lvl3pPr>
+            <a:lvl4pPr marL="0" marR="0" lvl="3" indent="0" algn="r" rtl="0">
+              <a:lnSpc>
+                <a:spcPct val="100000"/>
+              </a:lnSpc>
+              <a:spcBef>
+                <a:spcPts val="0"/>
+              </a:spcBef>
+              <a:spcAft>
+                <a:spcPts val="0"/>
+              </a:spcAft>
+              <a:buClr>
+                <a:srgbClr val="000000"/>
+              </a:buClr>
+              <a:buFont typeface="Arial"/>
+              <a:buNone/>
+              <a:defRPr sz="1200" b="0" i="0" u="none" strike="noStrike" cap="none">
+                <a:solidFill>
+                  <a:srgbClr val="888888"/>
+                </a:solidFill>
+                <a:latin typeface="Calibri"/>
+                <a:ea typeface="Calibri"/>
+                <a:cs typeface="Calibri"/>
+                <a:sym typeface="Calibri"/>
+              </a:defRPr>
+            </a:lvl4pPr>
+            <a:lvl5pPr marL="0" marR="0" lvl="4" indent="0" algn="r" rtl="0">
+              <a:lnSpc>
+                <a:spcPct val="100000"/>
+              </a:lnSpc>
+              <a:spcBef>
+                <a:spcPts val="0"/>
+              </a:spcBef>
+              <a:spcAft>
+                <a:spcPts val="0"/>
+              </a:spcAft>
+              <a:buClr>
+                <a:srgbClr val="000000"/>
+              </a:buClr>
+              <a:buFont typeface="Arial"/>
+              <a:buNone/>
+              <a:defRPr sz="1200" b="0" i="0" u="none" strike="noStrike" cap="none">
+                <a:solidFill>
+                  <a:srgbClr val="888888"/>
+                </a:solidFill>
+                <a:latin typeface="Calibri"/>
+                <a:ea typeface="Calibri"/>
+                <a:cs typeface="Calibri"/>
+                <a:sym typeface="Calibri"/>
+              </a:defRPr>
+            </a:lvl5pPr>
+            <a:lvl6pPr marL="0" marR="0" lvl="5" indent="0" algn="r" rtl="0">
+              <a:lnSpc>
+                <a:spcPct val="100000"/>
+              </a:lnSpc>
+              <a:spcBef>
+                <a:spcPts val="0"/>
+              </a:spcBef>
+              <a:spcAft>
+                <a:spcPts val="0"/>
+              </a:spcAft>
+              <a:buClr>
+                <a:srgbClr val="000000"/>
+              </a:buClr>
+              <a:buFont typeface="Arial"/>
+              <a:buNone/>
+              <a:defRPr sz="1200" b="0" i="0" u="none" strike="noStrike" cap="none">
+                <a:solidFill>
+                  <a:srgbClr val="888888"/>
+                </a:solidFill>
+                <a:latin typeface="Calibri"/>
+                <a:ea typeface="Calibri"/>
+                <a:cs typeface="Calibri"/>
+                <a:sym typeface="Calibri"/>
+              </a:defRPr>
+            </a:lvl6pPr>
+            <a:lvl7pPr marL="0" marR="0" lvl="6" indent="0" algn="r" rtl="0">
+              <a:lnSpc>
+                <a:spcPct val="100000"/>
+              </a:lnSpc>
+              <a:spcBef>
+                <a:spcPts val="0"/>
+              </a:spcBef>
+              <a:spcAft>
+                <a:spcPts val="0"/>
+              </a:spcAft>
+              <a:buClr>
+                <a:srgbClr val="000000"/>
+              </a:buClr>
+              <a:buFont typeface="Arial"/>
+              <a:buNone/>
+              <a:defRPr sz="1200" b="0" i="0" u="none" strike="noStrike" cap="none">
+                <a:solidFill>
+                  <a:srgbClr val="888888"/>
+                </a:solidFill>
+                <a:latin typeface="Calibri"/>
+                <a:ea typeface="Calibri"/>
+                <a:cs typeface="Calibri"/>
+                <a:sym typeface="Calibri"/>
+              </a:defRPr>
+            </a:lvl7pPr>
+            <a:lvl8pPr marL="0" marR="0" lvl="7" indent="0" algn="r" rtl="0">
+              <a:lnSpc>
+                <a:spcPct val="100000"/>
+              </a:lnSpc>
+              <a:spcBef>
+                <a:spcPts val="0"/>
+              </a:spcBef>
+              <a:spcAft>
+                <a:spcPts val="0"/>
+              </a:spcAft>
+              <a:buClr>
+                <a:srgbClr val="000000"/>
+              </a:buClr>
+              <a:buFont typeface="Arial"/>
+              <a:buNone/>
+              <a:defRPr sz="1200" b="0" i="0" u="none" strike="noStrike" cap="none">
+                <a:solidFill>
+                  <a:srgbClr val="888888"/>
+                </a:solidFill>
+                <a:latin typeface="Calibri"/>
+                <a:ea typeface="Calibri"/>
+                <a:cs typeface="Calibri"/>
+                <a:sym typeface="Calibri"/>
+              </a:defRPr>
+            </a:lvl8pPr>
+            <a:lvl9pPr marL="0" marR="0" lvl="8" indent="0" algn="r" rtl="0">
+              <a:lnSpc>
+                <a:spcPct val="100000"/>
+              </a:lnSpc>
+              <a:spcBef>
+                <a:spcPts val="0"/>
+              </a:spcBef>
+              <a:spcAft>
+                <a:spcPts val="0"/>
+              </a:spcAft>
+              <a:buClr>
+                <a:srgbClr val="000000"/>
+              </a:buClr>
+              <a:buFont typeface="Arial"/>
+              <a:buNone/>
+              <a:defRPr sz="1200" b="0" i="0" u="none" strike="noStrike" cap="none">
+                <a:solidFill>
+                  <a:srgbClr val="888888"/>
+                </a:solidFill>
+                <a:latin typeface="Calibri"/>
+                <a:ea typeface="Calibri"/>
+                <a:cs typeface="Calibri"/>
+                <a:sym typeface="Calibri"/>
+              </a:defRPr>
+            </a:lvl9pPr>
+          </a:lstStyle>
+          <a:p>
+            <a:fld id="{00000000-1234-1234-1234-123412341234}" type="slidenum">
+              <a:rPr lang="en-US" smtClean="0"/>
+              <a:pPr/>
+              <a:t>24</a:t>
+            </a:fld>
+            <a:endParaRPr lang="en-US" dirty="0"/>
+          </a:p>
+        </p:txBody>
+      </p:sp>
     </p:spTree>
   </p:cSld>
   <p:clrMapOvr>
@@ -26663,6 +29735,285 @@
           </a:ln>
         </p:spPr>
       </p:pic>
+      <p:sp>
+        <p:nvSpPr>
+          <p:cNvPr id="4" name="מציין מיקום של מספר שקופית 2">
+            <a:extLst>
+              <a:ext uri="{FF2B5EF4-FFF2-40B4-BE49-F238E27FC236}">
+                <a16:creationId xmlns:a16="http://schemas.microsoft.com/office/drawing/2014/main" id="{8C400F09-2F33-7709-6A11-BEF4437C5C0B}"/>
+              </a:ext>
+            </a:extLst>
+          </p:cNvPr>
+          <p:cNvSpPr txBox="1">
+            <a:spLocks/>
+          </p:cNvSpPr>
+          <p:nvPr/>
+        </p:nvSpPr>
+        <p:spPr>
+          <a:xfrm>
+            <a:off x="9972261" y="6381750"/>
+            <a:ext cx="2133600" cy="365125"/>
+          </a:xfrm>
+          <a:prstGeom prst="rect">
+            <a:avLst/>
+          </a:prstGeom>
+          <a:noFill/>
+          <a:ln>
+            <a:noFill/>
+          </a:ln>
+        </p:spPr>
+        <p:txBody>
+          <a:bodyPr spcFirstLastPara="1" wrap="square" lIns="91425" tIns="45700" rIns="91425" bIns="45700" anchor="ctr" anchorCtr="0">
+            <a:noAutofit/>
+          </a:bodyPr>
+          <a:lstStyle>
+            <a:defPPr marR="0" lvl="0" algn="l" rtl="0">
+              <a:lnSpc>
+                <a:spcPct val="100000"/>
+              </a:lnSpc>
+              <a:spcBef>
+                <a:spcPts val="0"/>
+              </a:spcBef>
+              <a:spcAft>
+                <a:spcPts val="0"/>
+              </a:spcAft>
+            </a:defPPr>
+            <a:lvl1pPr marL="0" marR="0" lvl="0" indent="0" algn="r" rtl="0">
+              <a:lnSpc>
+                <a:spcPct val="100000"/>
+              </a:lnSpc>
+              <a:spcBef>
+                <a:spcPts val="0"/>
+              </a:spcBef>
+              <a:spcAft>
+                <a:spcPts val="0"/>
+              </a:spcAft>
+              <a:buClr>
+                <a:srgbClr val="000000"/>
+              </a:buClr>
+              <a:buFont typeface="Arial"/>
+              <a:buNone/>
+              <a:defRPr sz="1200" b="0" i="0" u="none" strike="noStrike" cap="none">
+                <a:solidFill>
+                  <a:srgbClr val="888888"/>
+                </a:solidFill>
+                <a:latin typeface="Calibri"/>
+                <a:ea typeface="Calibri"/>
+                <a:cs typeface="Calibri"/>
+                <a:sym typeface="Calibri"/>
+              </a:defRPr>
+            </a:lvl1pPr>
+            <a:lvl2pPr marL="0" marR="0" lvl="1" indent="0" algn="r" rtl="0">
+              <a:lnSpc>
+                <a:spcPct val="100000"/>
+              </a:lnSpc>
+              <a:spcBef>
+                <a:spcPts val="0"/>
+              </a:spcBef>
+              <a:spcAft>
+                <a:spcPts val="0"/>
+              </a:spcAft>
+              <a:buClr>
+                <a:srgbClr val="000000"/>
+              </a:buClr>
+              <a:buFont typeface="Arial"/>
+              <a:buNone/>
+              <a:defRPr sz="1200" b="0" i="0" u="none" strike="noStrike" cap="none">
+                <a:solidFill>
+                  <a:srgbClr val="888888"/>
+                </a:solidFill>
+                <a:latin typeface="Calibri"/>
+                <a:ea typeface="Calibri"/>
+                <a:cs typeface="Calibri"/>
+                <a:sym typeface="Calibri"/>
+              </a:defRPr>
+            </a:lvl2pPr>
+            <a:lvl3pPr marL="0" marR="0" lvl="2" indent="0" algn="r" rtl="0">
+              <a:lnSpc>
+                <a:spcPct val="100000"/>
+              </a:lnSpc>
+              <a:spcBef>
+                <a:spcPts val="0"/>
+              </a:spcBef>
+              <a:spcAft>
+                <a:spcPts val="0"/>
+              </a:spcAft>
+              <a:buClr>
+                <a:srgbClr val="000000"/>
+              </a:buClr>
+              <a:buFont typeface="Arial"/>
+              <a:buNone/>
+              <a:defRPr sz="1200" b="0" i="0" u="none" strike="noStrike" cap="none">
+                <a:solidFill>
+                  <a:srgbClr val="888888"/>
+                </a:solidFill>
+                <a:latin typeface="Calibri"/>
+                <a:ea typeface="Calibri"/>
+                <a:cs typeface="Calibri"/>
+                <a:sym typeface="Calibri"/>
+              </a:defRPr>
+            </a:lvl3pPr>
+            <a:lvl4pPr marL="0" marR="0" lvl="3" indent="0" algn="r" rtl="0">
+              <a:lnSpc>
+                <a:spcPct val="100000"/>
+              </a:lnSpc>
+              <a:spcBef>
+                <a:spcPts val="0"/>
+              </a:spcBef>
+              <a:spcAft>
+                <a:spcPts val="0"/>
+              </a:spcAft>
+              <a:buClr>
+                <a:srgbClr val="000000"/>
+              </a:buClr>
+              <a:buFont typeface="Arial"/>
+              <a:buNone/>
+              <a:defRPr sz="1200" b="0" i="0" u="none" strike="noStrike" cap="none">
+                <a:solidFill>
+                  <a:srgbClr val="888888"/>
+                </a:solidFill>
+                <a:latin typeface="Calibri"/>
+                <a:ea typeface="Calibri"/>
+                <a:cs typeface="Calibri"/>
+                <a:sym typeface="Calibri"/>
+              </a:defRPr>
+            </a:lvl4pPr>
+            <a:lvl5pPr marL="0" marR="0" lvl="4" indent="0" algn="r" rtl="0">
+              <a:lnSpc>
+                <a:spcPct val="100000"/>
+              </a:lnSpc>
+              <a:spcBef>
+                <a:spcPts val="0"/>
+              </a:spcBef>
+              <a:spcAft>
+                <a:spcPts val="0"/>
+              </a:spcAft>
+              <a:buClr>
+                <a:srgbClr val="000000"/>
+              </a:buClr>
+              <a:buFont typeface="Arial"/>
+              <a:buNone/>
+              <a:defRPr sz="1200" b="0" i="0" u="none" strike="noStrike" cap="none">
+                <a:solidFill>
+                  <a:srgbClr val="888888"/>
+                </a:solidFill>
+                <a:latin typeface="Calibri"/>
+                <a:ea typeface="Calibri"/>
+                <a:cs typeface="Calibri"/>
+                <a:sym typeface="Calibri"/>
+              </a:defRPr>
+            </a:lvl5pPr>
+            <a:lvl6pPr marL="0" marR="0" lvl="5" indent="0" algn="r" rtl="0">
+              <a:lnSpc>
+                <a:spcPct val="100000"/>
+              </a:lnSpc>
+              <a:spcBef>
+                <a:spcPts val="0"/>
+              </a:spcBef>
+              <a:spcAft>
+                <a:spcPts val="0"/>
+              </a:spcAft>
+              <a:buClr>
+                <a:srgbClr val="000000"/>
+              </a:buClr>
+              <a:buFont typeface="Arial"/>
+              <a:buNone/>
+              <a:defRPr sz="1200" b="0" i="0" u="none" strike="noStrike" cap="none">
+                <a:solidFill>
+                  <a:srgbClr val="888888"/>
+                </a:solidFill>
+                <a:latin typeface="Calibri"/>
+                <a:ea typeface="Calibri"/>
+                <a:cs typeface="Calibri"/>
+                <a:sym typeface="Calibri"/>
+              </a:defRPr>
+            </a:lvl6pPr>
+            <a:lvl7pPr marL="0" marR="0" lvl="6" indent="0" algn="r" rtl="0">
+              <a:lnSpc>
+                <a:spcPct val="100000"/>
+              </a:lnSpc>
+              <a:spcBef>
+                <a:spcPts val="0"/>
+              </a:spcBef>
+              <a:spcAft>
+                <a:spcPts val="0"/>
+              </a:spcAft>
+              <a:buClr>
+                <a:srgbClr val="000000"/>
+              </a:buClr>
+              <a:buFont typeface="Arial"/>
+              <a:buNone/>
+              <a:defRPr sz="1200" b="0" i="0" u="none" strike="noStrike" cap="none">
+                <a:solidFill>
+                  <a:srgbClr val="888888"/>
+                </a:solidFill>
+                <a:latin typeface="Calibri"/>
+                <a:ea typeface="Calibri"/>
+                <a:cs typeface="Calibri"/>
+                <a:sym typeface="Calibri"/>
+              </a:defRPr>
+            </a:lvl7pPr>
+            <a:lvl8pPr marL="0" marR="0" lvl="7" indent="0" algn="r" rtl="0">
+              <a:lnSpc>
+                <a:spcPct val="100000"/>
+              </a:lnSpc>
+              <a:spcBef>
+                <a:spcPts val="0"/>
+              </a:spcBef>
+              <a:spcAft>
+                <a:spcPts val="0"/>
+              </a:spcAft>
+              <a:buClr>
+                <a:srgbClr val="000000"/>
+              </a:buClr>
+              <a:buFont typeface="Arial"/>
+              <a:buNone/>
+              <a:defRPr sz="1200" b="0" i="0" u="none" strike="noStrike" cap="none">
+                <a:solidFill>
+                  <a:srgbClr val="888888"/>
+                </a:solidFill>
+                <a:latin typeface="Calibri"/>
+                <a:ea typeface="Calibri"/>
+                <a:cs typeface="Calibri"/>
+                <a:sym typeface="Calibri"/>
+              </a:defRPr>
+            </a:lvl8pPr>
+            <a:lvl9pPr marL="0" marR="0" lvl="8" indent="0" algn="r" rtl="0">
+              <a:lnSpc>
+                <a:spcPct val="100000"/>
+              </a:lnSpc>
+              <a:spcBef>
+                <a:spcPts val="0"/>
+              </a:spcBef>
+              <a:spcAft>
+                <a:spcPts val="0"/>
+              </a:spcAft>
+              <a:buClr>
+                <a:srgbClr val="000000"/>
+              </a:buClr>
+              <a:buFont typeface="Arial"/>
+              <a:buNone/>
+              <a:defRPr sz="1200" b="0" i="0" u="none" strike="noStrike" cap="none">
+                <a:solidFill>
+                  <a:srgbClr val="888888"/>
+                </a:solidFill>
+                <a:latin typeface="Calibri"/>
+                <a:ea typeface="Calibri"/>
+                <a:cs typeface="Calibri"/>
+                <a:sym typeface="Calibri"/>
+              </a:defRPr>
+            </a:lvl9pPr>
+          </a:lstStyle>
+          <a:p>
+            <a:fld id="{00000000-1234-1234-1234-123412341234}" type="slidenum">
+              <a:rPr lang="en-US" smtClean="0"/>
+              <a:pPr/>
+              <a:t>25</a:t>
+            </a:fld>
+            <a:endParaRPr lang="en-US" dirty="0"/>
+          </a:p>
+        </p:txBody>
+      </p:sp>
     </p:spTree>
   </p:cSld>
   <p:clrMapOvr>
@@ -27376,6 +30727,271 @@
           </a:p>
         </p:txBody>
       </p:sp>
+      <p:sp>
+        <p:nvSpPr>
+          <p:cNvPr id="2" name="מציין מיקום של מספר שקופית 2">
+            <a:extLst>
+              <a:ext uri="{FF2B5EF4-FFF2-40B4-BE49-F238E27FC236}">
+                <a16:creationId xmlns:a16="http://schemas.microsoft.com/office/drawing/2014/main" id="{40775443-4862-D285-385F-7EBEBB6602CD}"/>
+              </a:ext>
+            </a:extLst>
+          </p:cNvPr>
+          <p:cNvSpPr txBox="1">
+            <a:spLocks/>
+          </p:cNvSpPr>
+          <p:nvPr/>
+        </p:nvSpPr>
+        <p:spPr>
+          <a:xfrm>
+            <a:off x="9972261" y="6381750"/>
+            <a:ext cx="2133600" cy="365125"/>
+          </a:xfrm>
+          <a:prstGeom prst="rect">
+            <a:avLst/>
+          </a:prstGeom>
+        </p:spPr>
+        <p:txBody>
+          <a:bodyPr/>
+          <a:lstStyle>
+            <a:defPPr marR="0" lvl="0" algn="l" rtl="0">
+              <a:lnSpc>
+                <a:spcPct val="100000"/>
+              </a:lnSpc>
+              <a:spcBef>
+                <a:spcPts val="0"/>
+              </a:spcBef>
+              <a:spcAft>
+                <a:spcPts val="0"/>
+              </a:spcAft>
+            </a:defPPr>
+            <a:lvl1pPr marR="0" lvl="0" algn="l" rtl="0">
+              <a:lnSpc>
+                <a:spcPct val="100000"/>
+              </a:lnSpc>
+              <a:spcBef>
+                <a:spcPts val="0"/>
+              </a:spcBef>
+              <a:spcAft>
+                <a:spcPts val="0"/>
+              </a:spcAft>
+              <a:buClr>
+                <a:srgbClr val="000000"/>
+              </a:buClr>
+              <a:buFont typeface="Arial"/>
+              <a:defRPr sz="1400" b="0" i="0" u="none" strike="noStrike" cap="none">
+                <a:solidFill>
+                  <a:srgbClr val="000000"/>
+                </a:solidFill>
+                <a:latin typeface="Arial"/>
+                <a:ea typeface="Arial"/>
+                <a:cs typeface="Arial"/>
+                <a:sym typeface="Arial"/>
+              </a:defRPr>
+            </a:lvl1pPr>
+            <a:lvl2pPr marR="0" lvl="1" algn="l" rtl="0">
+              <a:lnSpc>
+                <a:spcPct val="100000"/>
+              </a:lnSpc>
+              <a:spcBef>
+                <a:spcPts val="0"/>
+              </a:spcBef>
+              <a:spcAft>
+                <a:spcPts val="0"/>
+              </a:spcAft>
+              <a:buClr>
+                <a:srgbClr val="000000"/>
+              </a:buClr>
+              <a:buFont typeface="Arial"/>
+              <a:defRPr sz="1400" b="0" i="0" u="none" strike="noStrike" cap="none">
+                <a:solidFill>
+                  <a:srgbClr val="000000"/>
+                </a:solidFill>
+                <a:latin typeface="Arial"/>
+                <a:ea typeface="Arial"/>
+                <a:cs typeface="Arial"/>
+                <a:sym typeface="Arial"/>
+              </a:defRPr>
+            </a:lvl2pPr>
+            <a:lvl3pPr marR="0" lvl="2" algn="l" rtl="0">
+              <a:lnSpc>
+                <a:spcPct val="100000"/>
+              </a:lnSpc>
+              <a:spcBef>
+                <a:spcPts val="0"/>
+              </a:spcBef>
+              <a:spcAft>
+                <a:spcPts val="0"/>
+              </a:spcAft>
+              <a:buClr>
+                <a:srgbClr val="000000"/>
+              </a:buClr>
+              <a:buFont typeface="Arial"/>
+              <a:defRPr sz="1400" b="0" i="0" u="none" strike="noStrike" cap="none">
+                <a:solidFill>
+                  <a:srgbClr val="000000"/>
+                </a:solidFill>
+                <a:latin typeface="Arial"/>
+                <a:ea typeface="Arial"/>
+                <a:cs typeface="Arial"/>
+                <a:sym typeface="Arial"/>
+              </a:defRPr>
+            </a:lvl3pPr>
+            <a:lvl4pPr marR="0" lvl="3" algn="l" rtl="0">
+              <a:lnSpc>
+                <a:spcPct val="100000"/>
+              </a:lnSpc>
+              <a:spcBef>
+                <a:spcPts val="0"/>
+              </a:spcBef>
+              <a:spcAft>
+                <a:spcPts val="0"/>
+              </a:spcAft>
+              <a:buClr>
+                <a:srgbClr val="000000"/>
+              </a:buClr>
+              <a:buFont typeface="Arial"/>
+              <a:defRPr sz="1400" b="0" i="0" u="none" strike="noStrike" cap="none">
+                <a:solidFill>
+                  <a:srgbClr val="000000"/>
+                </a:solidFill>
+                <a:latin typeface="Arial"/>
+                <a:ea typeface="Arial"/>
+                <a:cs typeface="Arial"/>
+                <a:sym typeface="Arial"/>
+              </a:defRPr>
+            </a:lvl4pPr>
+            <a:lvl5pPr marR="0" lvl="4" algn="l" rtl="0">
+              <a:lnSpc>
+                <a:spcPct val="100000"/>
+              </a:lnSpc>
+              <a:spcBef>
+                <a:spcPts val="0"/>
+              </a:spcBef>
+              <a:spcAft>
+                <a:spcPts val="0"/>
+              </a:spcAft>
+              <a:buClr>
+                <a:srgbClr val="000000"/>
+              </a:buClr>
+              <a:buFont typeface="Arial"/>
+              <a:defRPr sz="1400" b="0" i="0" u="none" strike="noStrike" cap="none">
+                <a:solidFill>
+                  <a:srgbClr val="000000"/>
+                </a:solidFill>
+                <a:latin typeface="Arial"/>
+                <a:ea typeface="Arial"/>
+                <a:cs typeface="Arial"/>
+                <a:sym typeface="Arial"/>
+              </a:defRPr>
+            </a:lvl5pPr>
+            <a:lvl6pPr marR="0" lvl="5" algn="l" rtl="0">
+              <a:lnSpc>
+                <a:spcPct val="100000"/>
+              </a:lnSpc>
+              <a:spcBef>
+                <a:spcPts val="0"/>
+              </a:spcBef>
+              <a:spcAft>
+                <a:spcPts val="0"/>
+              </a:spcAft>
+              <a:buClr>
+                <a:srgbClr val="000000"/>
+              </a:buClr>
+              <a:buFont typeface="Arial"/>
+              <a:defRPr sz="1400" b="0" i="0" u="none" strike="noStrike" cap="none">
+                <a:solidFill>
+                  <a:srgbClr val="000000"/>
+                </a:solidFill>
+                <a:latin typeface="Arial"/>
+                <a:ea typeface="Arial"/>
+                <a:cs typeface="Arial"/>
+                <a:sym typeface="Arial"/>
+              </a:defRPr>
+            </a:lvl6pPr>
+            <a:lvl7pPr marR="0" lvl="6" algn="l" rtl="0">
+              <a:lnSpc>
+                <a:spcPct val="100000"/>
+              </a:lnSpc>
+              <a:spcBef>
+                <a:spcPts val="0"/>
+              </a:spcBef>
+              <a:spcAft>
+                <a:spcPts val="0"/>
+              </a:spcAft>
+              <a:buClr>
+                <a:srgbClr val="000000"/>
+              </a:buClr>
+              <a:buFont typeface="Arial"/>
+              <a:defRPr sz="1400" b="0" i="0" u="none" strike="noStrike" cap="none">
+                <a:solidFill>
+                  <a:srgbClr val="000000"/>
+                </a:solidFill>
+                <a:latin typeface="Arial"/>
+                <a:ea typeface="Arial"/>
+                <a:cs typeface="Arial"/>
+                <a:sym typeface="Arial"/>
+              </a:defRPr>
+            </a:lvl7pPr>
+            <a:lvl8pPr marR="0" lvl="7" algn="l" rtl="0">
+              <a:lnSpc>
+                <a:spcPct val="100000"/>
+              </a:lnSpc>
+              <a:spcBef>
+                <a:spcPts val="0"/>
+              </a:spcBef>
+              <a:spcAft>
+                <a:spcPts val="0"/>
+              </a:spcAft>
+              <a:buClr>
+                <a:srgbClr val="000000"/>
+              </a:buClr>
+              <a:buFont typeface="Arial"/>
+              <a:defRPr sz="1400" b="0" i="0" u="none" strike="noStrike" cap="none">
+                <a:solidFill>
+                  <a:srgbClr val="000000"/>
+                </a:solidFill>
+                <a:latin typeface="Arial"/>
+                <a:ea typeface="Arial"/>
+                <a:cs typeface="Arial"/>
+                <a:sym typeface="Arial"/>
+              </a:defRPr>
+            </a:lvl8pPr>
+            <a:lvl9pPr marR="0" lvl="8" algn="l" rtl="0">
+              <a:lnSpc>
+                <a:spcPct val="100000"/>
+              </a:lnSpc>
+              <a:spcBef>
+                <a:spcPts val="0"/>
+              </a:spcBef>
+              <a:spcAft>
+                <a:spcPts val="0"/>
+              </a:spcAft>
+              <a:buClr>
+                <a:srgbClr val="000000"/>
+              </a:buClr>
+              <a:buFont typeface="Arial"/>
+              <a:defRPr sz="1400" b="0" i="0" u="none" strike="noStrike" cap="none">
+                <a:solidFill>
+                  <a:srgbClr val="000000"/>
+                </a:solidFill>
+                <a:latin typeface="Arial"/>
+                <a:ea typeface="Arial"/>
+                <a:cs typeface="Arial"/>
+                <a:sym typeface="Arial"/>
+              </a:defRPr>
+            </a:lvl9pPr>
+          </a:lstStyle>
+          <a:p>
+            <a:pPr algn="r"/>
+            <a:fld id="{00000000-1234-1234-1234-123412341234}" type="slidenum">
+              <a:rPr lang="en-US" smtClean="0"/>
+              <a:pPr algn="r"/>
+              <a:t>26</a:t>
+            </a:fld>
+            <a:endParaRPr lang="en-US" dirty="0"/>
+          </a:p>
+        </p:txBody>
+      </p:sp>
     </p:spTree>
   </p:cSld>
   <p:clrMapOvr>
@@ -27633,6 +31249,314 @@
               <a:buNone/>
             </a:pPr>
             <a:endParaRPr lang="he-IL" noProof="0" dirty="0"/>
+          </a:p>
+        </p:txBody>
+      </p:sp>
+      <p:sp>
+        <p:nvSpPr>
+          <p:cNvPr id="3" name="מציין מיקום של מספר שקופית 2">
+            <a:extLst>
+              <a:ext uri="{FF2B5EF4-FFF2-40B4-BE49-F238E27FC236}">
+                <a16:creationId xmlns:a16="http://schemas.microsoft.com/office/drawing/2014/main" id="{E0662C80-FF9B-C7EE-6F5F-847A97CADDC6}"/>
+              </a:ext>
+            </a:extLst>
+          </p:cNvPr>
+          <p:cNvSpPr>
+            <a:spLocks noGrp="1"/>
+          </p:cNvSpPr>
+          <p:nvPr>
+            <p:ph type="sldNum" idx="12"/>
+          </p:nvPr>
+        </p:nvSpPr>
+        <p:spPr/>
+        <p:txBody>
+          <a:bodyPr/>
+          <a:lstStyle/>
+          <a:p>
+            <a:pPr marL="0" lvl="0" indent="0" algn="r" rtl="0">
+              <a:spcBef>
+                <a:spcPts val="0"/>
+              </a:spcBef>
+              <a:spcAft>
+                <a:spcPts val="0"/>
+              </a:spcAft>
+              <a:buNone/>
+            </a:pPr>
+            <a:endParaRPr lang="en-US" dirty="0"/>
+          </a:p>
+        </p:txBody>
+      </p:sp>
+      <p:sp>
+        <p:nvSpPr>
+          <p:cNvPr id="4" name="מציין מיקום של מספר שקופית 2">
+            <a:extLst>
+              <a:ext uri="{FF2B5EF4-FFF2-40B4-BE49-F238E27FC236}">
+                <a16:creationId xmlns:a16="http://schemas.microsoft.com/office/drawing/2014/main" id="{1C4976BF-6A3F-9143-3C77-6EEC91DCBE67}"/>
+              </a:ext>
+            </a:extLst>
+          </p:cNvPr>
+          <p:cNvSpPr txBox="1">
+            <a:spLocks/>
+          </p:cNvSpPr>
+          <p:nvPr/>
+        </p:nvSpPr>
+        <p:spPr>
+          <a:xfrm>
+            <a:off x="9972261" y="6381750"/>
+            <a:ext cx="2133600" cy="365125"/>
+          </a:xfrm>
+          <a:prstGeom prst="rect">
+            <a:avLst/>
+          </a:prstGeom>
+          <a:noFill/>
+          <a:ln>
+            <a:noFill/>
+          </a:ln>
+        </p:spPr>
+        <p:txBody>
+          <a:bodyPr spcFirstLastPara="1" wrap="square" lIns="91425" tIns="45700" rIns="91425" bIns="45700" anchor="ctr" anchorCtr="0">
+            <a:noAutofit/>
+          </a:bodyPr>
+          <a:lstStyle>
+            <a:defPPr marR="0" lvl="0" algn="l" rtl="0">
+              <a:lnSpc>
+                <a:spcPct val="100000"/>
+              </a:lnSpc>
+              <a:spcBef>
+                <a:spcPts val="0"/>
+              </a:spcBef>
+              <a:spcAft>
+                <a:spcPts val="0"/>
+              </a:spcAft>
+            </a:defPPr>
+            <a:lvl1pPr marL="0" marR="0" lvl="0" indent="0" algn="r" rtl="0">
+              <a:lnSpc>
+                <a:spcPct val="100000"/>
+              </a:lnSpc>
+              <a:spcBef>
+                <a:spcPts val="0"/>
+              </a:spcBef>
+              <a:spcAft>
+                <a:spcPts val="0"/>
+              </a:spcAft>
+              <a:buClr>
+                <a:srgbClr val="000000"/>
+              </a:buClr>
+              <a:buFont typeface="Arial"/>
+              <a:buNone/>
+              <a:defRPr sz="1200" b="0" i="0" u="none" strike="noStrike" cap="none">
+                <a:solidFill>
+                  <a:srgbClr val="888888"/>
+                </a:solidFill>
+                <a:latin typeface="Calibri"/>
+                <a:ea typeface="Calibri"/>
+                <a:cs typeface="Calibri"/>
+                <a:sym typeface="Calibri"/>
+              </a:defRPr>
+            </a:lvl1pPr>
+            <a:lvl2pPr marL="0" marR="0" lvl="1" indent="0" algn="r" rtl="0">
+              <a:lnSpc>
+                <a:spcPct val="100000"/>
+              </a:lnSpc>
+              <a:spcBef>
+                <a:spcPts val="0"/>
+              </a:spcBef>
+              <a:spcAft>
+                <a:spcPts val="0"/>
+              </a:spcAft>
+              <a:buClr>
+                <a:srgbClr val="000000"/>
+              </a:buClr>
+              <a:buFont typeface="Arial"/>
+              <a:buNone/>
+              <a:defRPr sz="1200" b="0" i="0" u="none" strike="noStrike" cap="none">
+                <a:solidFill>
+                  <a:srgbClr val="888888"/>
+                </a:solidFill>
+                <a:latin typeface="Calibri"/>
+                <a:ea typeface="Calibri"/>
+                <a:cs typeface="Calibri"/>
+                <a:sym typeface="Calibri"/>
+              </a:defRPr>
+            </a:lvl2pPr>
+            <a:lvl3pPr marL="0" marR="0" lvl="2" indent="0" algn="r" rtl="0">
+              <a:lnSpc>
+                <a:spcPct val="100000"/>
+              </a:lnSpc>
+              <a:spcBef>
+                <a:spcPts val="0"/>
+              </a:spcBef>
+              <a:spcAft>
+                <a:spcPts val="0"/>
+              </a:spcAft>
+              <a:buClr>
+                <a:srgbClr val="000000"/>
+              </a:buClr>
+              <a:buFont typeface="Arial"/>
+              <a:buNone/>
+              <a:defRPr sz="1200" b="0" i="0" u="none" strike="noStrike" cap="none">
+                <a:solidFill>
+                  <a:srgbClr val="888888"/>
+                </a:solidFill>
+                <a:latin typeface="Calibri"/>
+                <a:ea typeface="Calibri"/>
+                <a:cs typeface="Calibri"/>
+                <a:sym typeface="Calibri"/>
+              </a:defRPr>
+            </a:lvl3pPr>
+            <a:lvl4pPr marL="0" marR="0" lvl="3" indent="0" algn="r" rtl="0">
+              <a:lnSpc>
+                <a:spcPct val="100000"/>
+              </a:lnSpc>
+              <a:spcBef>
+                <a:spcPts val="0"/>
+              </a:spcBef>
+              <a:spcAft>
+                <a:spcPts val="0"/>
+              </a:spcAft>
+              <a:buClr>
+                <a:srgbClr val="000000"/>
+              </a:buClr>
+              <a:buFont typeface="Arial"/>
+              <a:buNone/>
+              <a:defRPr sz="1200" b="0" i="0" u="none" strike="noStrike" cap="none">
+                <a:solidFill>
+                  <a:srgbClr val="888888"/>
+                </a:solidFill>
+                <a:latin typeface="Calibri"/>
+                <a:ea typeface="Calibri"/>
+                <a:cs typeface="Calibri"/>
+                <a:sym typeface="Calibri"/>
+              </a:defRPr>
+            </a:lvl4pPr>
+            <a:lvl5pPr marL="0" marR="0" lvl="4" indent="0" algn="r" rtl="0">
+              <a:lnSpc>
+                <a:spcPct val="100000"/>
+              </a:lnSpc>
+              <a:spcBef>
+                <a:spcPts val="0"/>
+              </a:spcBef>
+              <a:spcAft>
+                <a:spcPts val="0"/>
+              </a:spcAft>
+              <a:buClr>
+                <a:srgbClr val="000000"/>
+              </a:buClr>
+              <a:buFont typeface="Arial"/>
+              <a:buNone/>
+              <a:defRPr sz="1200" b="0" i="0" u="none" strike="noStrike" cap="none">
+                <a:solidFill>
+                  <a:srgbClr val="888888"/>
+                </a:solidFill>
+                <a:latin typeface="Calibri"/>
+                <a:ea typeface="Calibri"/>
+                <a:cs typeface="Calibri"/>
+                <a:sym typeface="Calibri"/>
+              </a:defRPr>
+            </a:lvl5pPr>
+            <a:lvl6pPr marL="0" marR="0" lvl="5" indent="0" algn="r" rtl="0">
+              <a:lnSpc>
+                <a:spcPct val="100000"/>
+              </a:lnSpc>
+              <a:spcBef>
+                <a:spcPts val="0"/>
+              </a:spcBef>
+              <a:spcAft>
+                <a:spcPts val="0"/>
+              </a:spcAft>
+              <a:buClr>
+                <a:srgbClr val="000000"/>
+              </a:buClr>
+              <a:buFont typeface="Arial"/>
+              <a:buNone/>
+              <a:defRPr sz="1200" b="0" i="0" u="none" strike="noStrike" cap="none">
+                <a:solidFill>
+                  <a:srgbClr val="888888"/>
+                </a:solidFill>
+                <a:latin typeface="Calibri"/>
+                <a:ea typeface="Calibri"/>
+                <a:cs typeface="Calibri"/>
+                <a:sym typeface="Calibri"/>
+              </a:defRPr>
+            </a:lvl6pPr>
+            <a:lvl7pPr marL="0" marR="0" lvl="6" indent="0" algn="r" rtl="0">
+              <a:lnSpc>
+                <a:spcPct val="100000"/>
+              </a:lnSpc>
+              <a:spcBef>
+                <a:spcPts val="0"/>
+              </a:spcBef>
+              <a:spcAft>
+                <a:spcPts val="0"/>
+              </a:spcAft>
+              <a:buClr>
+                <a:srgbClr val="000000"/>
+              </a:buClr>
+              <a:buFont typeface="Arial"/>
+              <a:buNone/>
+              <a:defRPr sz="1200" b="0" i="0" u="none" strike="noStrike" cap="none">
+                <a:solidFill>
+                  <a:srgbClr val="888888"/>
+                </a:solidFill>
+                <a:latin typeface="Calibri"/>
+                <a:ea typeface="Calibri"/>
+                <a:cs typeface="Calibri"/>
+                <a:sym typeface="Calibri"/>
+              </a:defRPr>
+            </a:lvl7pPr>
+            <a:lvl8pPr marL="0" marR="0" lvl="7" indent="0" algn="r" rtl="0">
+              <a:lnSpc>
+                <a:spcPct val="100000"/>
+              </a:lnSpc>
+              <a:spcBef>
+                <a:spcPts val="0"/>
+              </a:spcBef>
+              <a:spcAft>
+                <a:spcPts val="0"/>
+              </a:spcAft>
+              <a:buClr>
+                <a:srgbClr val="000000"/>
+              </a:buClr>
+              <a:buFont typeface="Arial"/>
+              <a:buNone/>
+              <a:defRPr sz="1200" b="0" i="0" u="none" strike="noStrike" cap="none">
+                <a:solidFill>
+                  <a:srgbClr val="888888"/>
+                </a:solidFill>
+                <a:latin typeface="Calibri"/>
+                <a:ea typeface="Calibri"/>
+                <a:cs typeface="Calibri"/>
+                <a:sym typeface="Calibri"/>
+              </a:defRPr>
+            </a:lvl8pPr>
+            <a:lvl9pPr marL="0" marR="0" lvl="8" indent="0" algn="r" rtl="0">
+              <a:lnSpc>
+                <a:spcPct val="100000"/>
+              </a:lnSpc>
+              <a:spcBef>
+                <a:spcPts val="0"/>
+              </a:spcBef>
+              <a:spcAft>
+                <a:spcPts val="0"/>
+              </a:spcAft>
+              <a:buClr>
+                <a:srgbClr val="000000"/>
+              </a:buClr>
+              <a:buFont typeface="Arial"/>
+              <a:buNone/>
+              <a:defRPr sz="1200" b="0" i="0" u="none" strike="noStrike" cap="none">
+                <a:solidFill>
+                  <a:srgbClr val="888888"/>
+                </a:solidFill>
+                <a:latin typeface="Calibri"/>
+                <a:ea typeface="Calibri"/>
+                <a:cs typeface="Calibri"/>
+                <a:sym typeface="Calibri"/>
+              </a:defRPr>
+            </a:lvl9pPr>
+          </a:lstStyle>
+          <a:p>
+            <a:endParaRPr lang="en-US" dirty="0"/>
           </a:p>
         </p:txBody>
       </p:sp>
@@ -29110,6 +33034,49 @@
           </a:ln>
         </p:spPr>
       </p:pic>
+      <p:sp>
+        <p:nvSpPr>
+          <p:cNvPr id="3" name="מציין מיקום של מספר שקופית 2">
+            <a:extLst>
+              <a:ext uri="{FF2B5EF4-FFF2-40B4-BE49-F238E27FC236}">
+                <a16:creationId xmlns:a16="http://schemas.microsoft.com/office/drawing/2014/main" id="{1C840D03-9B7E-7215-12D2-006BCD8800FE}"/>
+              </a:ext>
+            </a:extLst>
+          </p:cNvPr>
+          <p:cNvSpPr>
+            <a:spLocks noGrp="1"/>
+          </p:cNvSpPr>
+          <p:nvPr>
+            <p:ph type="sldNum" idx="12"/>
+          </p:nvPr>
+        </p:nvSpPr>
+        <p:spPr>
+          <a:xfrm>
+            <a:off x="9907032" y="6273302"/>
+            <a:ext cx="2133600" cy="365125"/>
+          </a:xfrm>
+        </p:spPr>
+        <p:txBody>
+          <a:bodyPr/>
+          <a:lstStyle/>
+          <a:p>
+            <a:pPr marL="0" lvl="0" indent="0" algn="r" rtl="0">
+              <a:spcBef>
+                <a:spcPts val="0"/>
+              </a:spcBef>
+              <a:spcAft>
+                <a:spcPts val="0"/>
+              </a:spcAft>
+              <a:buNone/>
+            </a:pPr>
+            <a:fld id="{00000000-1234-1234-1234-123412341234}" type="slidenum">
+              <a:rPr lang="en-US" smtClean="0"/>
+              <a:t>3</a:t>
+            </a:fld>
+            <a:endParaRPr lang="en-US" dirty="0"/>
+          </a:p>
+        </p:txBody>
+      </p:sp>
     </p:spTree>
   </p:cSld>
   <p:clrMapOvr>
@@ -29561,6 +33528,49 @@
               <a:t>.</a:t>
             </a:r>
             <a:endParaRPr lang="he-IL" sz="1600" noProof="0" dirty="0"/>
+          </a:p>
+        </p:txBody>
+      </p:sp>
+      <p:sp>
+        <p:nvSpPr>
+          <p:cNvPr id="3" name="מציין מיקום של מספר שקופית 2">
+            <a:extLst>
+              <a:ext uri="{FF2B5EF4-FFF2-40B4-BE49-F238E27FC236}">
+                <a16:creationId xmlns:a16="http://schemas.microsoft.com/office/drawing/2014/main" id="{274DD2B3-FFE7-9BEA-C580-2486AA96FA9B}"/>
+              </a:ext>
+            </a:extLst>
+          </p:cNvPr>
+          <p:cNvSpPr>
+            <a:spLocks noGrp="1"/>
+          </p:cNvSpPr>
+          <p:nvPr>
+            <p:ph type="sldNum" idx="12"/>
+          </p:nvPr>
+        </p:nvSpPr>
+        <p:spPr>
+          <a:xfrm>
+            <a:off x="9921145" y="6302374"/>
+            <a:ext cx="2133600" cy="365125"/>
+          </a:xfrm>
+        </p:spPr>
+        <p:txBody>
+          <a:bodyPr/>
+          <a:lstStyle/>
+          <a:p>
+            <a:pPr marL="0" lvl="0" indent="0" algn="r" rtl="0">
+              <a:spcBef>
+                <a:spcPts val="0"/>
+              </a:spcBef>
+              <a:spcAft>
+                <a:spcPts val="0"/>
+              </a:spcAft>
+              <a:buNone/>
+            </a:pPr>
+            <a:fld id="{00000000-1234-1234-1234-123412341234}" type="slidenum">
+              <a:rPr lang="en-US" smtClean="0"/>
+              <a:t>4</a:t>
+            </a:fld>
+            <a:endParaRPr lang="en-US" dirty="0"/>
           </a:p>
         </p:txBody>
       </p:sp>
@@ -30235,6 +34245,271 @@
           </a:prstGeom>
         </p:spPr>
       </p:pic>
+      <p:sp>
+        <p:nvSpPr>
+          <p:cNvPr id="2" name="מציין מיקום של מספר שקופית 2">
+            <a:extLst>
+              <a:ext uri="{FF2B5EF4-FFF2-40B4-BE49-F238E27FC236}">
+                <a16:creationId xmlns:a16="http://schemas.microsoft.com/office/drawing/2014/main" id="{74213DB2-864D-FFE9-6EB9-A74396348029}"/>
+              </a:ext>
+            </a:extLst>
+          </p:cNvPr>
+          <p:cNvSpPr txBox="1">
+            <a:spLocks/>
+          </p:cNvSpPr>
+          <p:nvPr/>
+        </p:nvSpPr>
+        <p:spPr>
+          <a:xfrm>
+            <a:off x="9972261" y="6381750"/>
+            <a:ext cx="2133600" cy="365125"/>
+          </a:xfrm>
+          <a:prstGeom prst="rect">
+            <a:avLst/>
+          </a:prstGeom>
+        </p:spPr>
+        <p:txBody>
+          <a:bodyPr/>
+          <a:lstStyle>
+            <a:defPPr marR="0" lvl="0" algn="l" rtl="0">
+              <a:lnSpc>
+                <a:spcPct val="100000"/>
+              </a:lnSpc>
+              <a:spcBef>
+                <a:spcPts val="0"/>
+              </a:spcBef>
+              <a:spcAft>
+                <a:spcPts val="0"/>
+              </a:spcAft>
+            </a:defPPr>
+            <a:lvl1pPr marR="0" lvl="0" algn="l" rtl="0">
+              <a:lnSpc>
+                <a:spcPct val="100000"/>
+              </a:lnSpc>
+              <a:spcBef>
+                <a:spcPts val="0"/>
+              </a:spcBef>
+              <a:spcAft>
+                <a:spcPts val="0"/>
+              </a:spcAft>
+              <a:buClr>
+                <a:srgbClr val="000000"/>
+              </a:buClr>
+              <a:buFont typeface="Arial"/>
+              <a:defRPr sz="1400" b="0" i="0" u="none" strike="noStrike" cap="none">
+                <a:solidFill>
+                  <a:srgbClr val="000000"/>
+                </a:solidFill>
+                <a:latin typeface="Arial"/>
+                <a:ea typeface="Arial"/>
+                <a:cs typeface="Arial"/>
+                <a:sym typeface="Arial"/>
+              </a:defRPr>
+            </a:lvl1pPr>
+            <a:lvl2pPr marR="0" lvl="1" algn="l" rtl="0">
+              <a:lnSpc>
+                <a:spcPct val="100000"/>
+              </a:lnSpc>
+              <a:spcBef>
+                <a:spcPts val="0"/>
+              </a:spcBef>
+              <a:spcAft>
+                <a:spcPts val="0"/>
+              </a:spcAft>
+              <a:buClr>
+                <a:srgbClr val="000000"/>
+              </a:buClr>
+              <a:buFont typeface="Arial"/>
+              <a:defRPr sz="1400" b="0" i="0" u="none" strike="noStrike" cap="none">
+                <a:solidFill>
+                  <a:srgbClr val="000000"/>
+                </a:solidFill>
+                <a:latin typeface="Arial"/>
+                <a:ea typeface="Arial"/>
+                <a:cs typeface="Arial"/>
+                <a:sym typeface="Arial"/>
+              </a:defRPr>
+            </a:lvl2pPr>
+            <a:lvl3pPr marR="0" lvl="2" algn="l" rtl="0">
+              <a:lnSpc>
+                <a:spcPct val="100000"/>
+              </a:lnSpc>
+              <a:spcBef>
+                <a:spcPts val="0"/>
+              </a:spcBef>
+              <a:spcAft>
+                <a:spcPts val="0"/>
+              </a:spcAft>
+              <a:buClr>
+                <a:srgbClr val="000000"/>
+              </a:buClr>
+              <a:buFont typeface="Arial"/>
+              <a:defRPr sz="1400" b="0" i="0" u="none" strike="noStrike" cap="none">
+                <a:solidFill>
+                  <a:srgbClr val="000000"/>
+                </a:solidFill>
+                <a:latin typeface="Arial"/>
+                <a:ea typeface="Arial"/>
+                <a:cs typeface="Arial"/>
+                <a:sym typeface="Arial"/>
+              </a:defRPr>
+            </a:lvl3pPr>
+            <a:lvl4pPr marR="0" lvl="3" algn="l" rtl="0">
+              <a:lnSpc>
+                <a:spcPct val="100000"/>
+              </a:lnSpc>
+              <a:spcBef>
+                <a:spcPts val="0"/>
+              </a:spcBef>
+              <a:spcAft>
+                <a:spcPts val="0"/>
+              </a:spcAft>
+              <a:buClr>
+                <a:srgbClr val="000000"/>
+              </a:buClr>
+              <a:buFont typeface="Arial"/>
+              <a:defRPr sz="1400" b="0" i="0" u="none" strike="noStrike" cap="none">
+                <a:solidFill>
+                  <a:srgbClr val="000000"/>
+                </a:solidFill>
+                <a:latin typeface="Arial"/>
+                <a:ea typeface="Arial"/>
+                <a:cs typeface="Arial"/>
+                <a:sym typeface="Arial"/>
+              </a:defRPr>
+            </a:lvl4pPr>
+            <a:lvl5pPr marR="0" lvl="4" algn="l" rtl="0">
+              <a:lnSpc>
+                <a:spcPct val="100000"/>
+              </a:lnSpc>
+              <a:spcBef>
+                <a:spcPts val="0"/>
+              </a:spcBef>
+              <a:spcAft>
+                <a:spcPts val="0"/>
+              </a:spcAft>
+              <a:buClr>
+                <a:srgbClr val="000000"/>
+              </a:buClr>
+              <a:buFont typeface="Arial"/>
+              <a:defRPr sz="1400" b="0" i="0" u="none" strike="noStrike" cap="none">
+                <a:solidFill>
+                  <a:srgbClr val="000000"/>
+                </a:solidFill>
+                <a:latin typeface="Arial"/>
+                <a:ea typeface="Arial"/>
+                <a:cs typeface="Arial"/>
+                <a:sym typeface="Arial"/>
+              </a:defRPr>
+            </a:lvl5pPr>
+            <a:lvl6pPr marR="0" lvl="5" algn="l" rtl="0">
+              <a:lnSpc>
+                <a:spcPct val="100000"/>
+              </a:lnSpc>
+              <a:spcBef>
+                <a:spcPts val="0"/>
+              </a:spcBef>
+              <a:spcAft>
+                <a:spcPts val="0"/>
+              </a:spcAft>
+              <a:buClr>
+                <a:srgbClr val="000000"/>
+              </a:buClr>
+              <a:buFont typeface="Arial"/>
+              <a:defRPr sz="1400" b="0" i="0" u="none" strike="noStrike" cap="none">
+                <a:solidFill>
+                  <a:srgbClr val="000000"/>
+                </a:solidFill>
+                <a:latin typeface="Arial"/>
+                <a:ea typeface="Arial"/>
+                <a:cs typeface="Arial"/>
+                <a:sym typeface="Arial"/>
+              </a:defRPr>
+            </a:lvl6pPr>
+            <a:lvl7pPr marR="0" lvl="6" algn="l" rtl="0">
+              <a:lnSpc>
+                <a:spcPct val="100000"/>
+              </a:lnSpc>
+              <a:spcBef>
+                <a:spcPts val="0"/>
+              </a:spcBef>
+              <a:spcAft>
+                <a:spcPts val="0"/>
+              </a:spcAft>
+              <a:buClr>
+                <a:srgbClr val="000000"/>
+              </a:buClr>
+              <a:buFont typeface="Arial"/>
+              <a:defRPr sz="1400" b="0" i="0" u="none" strike="noStrike" cap="none">
+                <a:solidFill>
+                  <a:srgbClr val="000000"/>
+                </a:solidFill>
+                <a:latin typeface="Arial"/>
+                <a:ea typeface="Arial"/>
+                <a:cs typeface="Arial"/>
+                <a:sym typeface="Arial"/>
+              </a:defRPr>
+            </a:lvl7pPr>
+            <a:lvl8pPr marR="0" lvl="7" algn="l" rtl="0">
+              <a:lnSpc>
+                <a:spcPct val="100000"/>
+              </a:lnSpc>
+              <a:spcBef>
+                <a:spcPts val="0"/>
+              </a:spcBef>
+              <a:spcAft>
+                <a:spcPts val="0"/>
+              </a:spcAft>
+              <a:buClr>
+                <a:srgbClr val="000000"/>
+              </a:buClr>
+              <a:buFont typeface="Arial"/>
+              <a:defRPr sz="1400" b="0" i="0" u="none" strike="noStrike" cap="none">
+                <a:solidFill>
+                  <a:srgbClr val="000000"/>
+                </a:solidFill>
+                <a:latin typeface="Arial"/>
+                <a:ea typeface="Arial"/>
+                <a:cs typeface="Arial"/>
+                <a:sym typeface="Arial"/>
+              </a:defRPr>
+            </a:lvl8pPr>
+            <a:lvl9pPr marR="0" lvl="8" algn="l" rtl="0">
+              <a:lnSpc>
+                <a:spcPct val="100000"/>
+              </a:lnSpc>
+              <a:spcBef>
+                <a:spcPts val="0"/>
+              </a:spcBef>
+              <a:spcAft>
+                <a:spcPts val="0"/>
+              </a:spcAft>
+              <a:buClr>
+                <a:srgbClr val="000000"/>
+              </a:buClr>
+              <a:buFont typeface="Arial"/>
+              <a:defRPr sz="1400" b="0" i="0" u="none" strike="noStrike" cap="none">
+                <a:solidFill>
+                  <a:srgbClr val="000000"/>
+                </a:solidFill>
+                <a:latin typeface="Arial"/>
+                <a:ea typeface="Arial"/>
+                <a:cs typeface="Arial"/>
+                <a:sym typeface="Arial"/>
+              </a:defRPr>
+            </a:lvl9pPr>
+          </a:lstStyle>
+          <a:p>
+            <a:pPr algn="r"/>
+            <a:fld id="{00000000-1234-1234-1234-123412341234}" type="slidenum">
+              <a:rPr lang="en-US" smtClean="0"/>
+              <a:pPr algn="r"/>
+              <a:t>5</a:t>
+            </a:fld>
+            <a:endParaRPr lang="en-US" dirty="0"/>
+          </a:p>
+        </p:txBody>
+      </p:sp>
     </p:spTree>
   </p:cSld>
   <p:clrMapOvr>
@@ -30897,6 +35172,49 @@
               <a:t>כל דבר הוא פקודה וכל ערך הוא מחרוזת. חוקיות עקבית לאורך כל השפה.</a:t>
             </a:r>
             <a:endParaRPr lang="he-IL" sz="1600" noProof="0" dirty="0"/>
+          </a:p>
+        </p:txBody>
+      </p:sp>
+      <p:sp>
+        <p:nvSpPr>
+          <p:cNvPr id="3" name="מציין מיקום של מספר שקופית 2">
+            <a:extLst>
+              <a:ext uri="{FF2B5EF4-FFF2-40B4-BE49-F238E27FC236}">
+                <a16:creationId xmlns:a16="http://schemas.microsoft.com/office/drawing/2014/main" id="{125B9B29-D6CF-A6D1-FFF7-8C86B5574FDC}"/>
+              </a:ext>
+            </a:extLst>
+          </p:cNvPr>
+          <p:cNvSpPr>
+            <a:spLocks noGrp="1"/>
+          </p:cNvSpPr>
+          <p:nvPr>
+            <p:ph type="sldNum" idx="12"/>
+          </p:nvPr>
+        </p:nvSpPr>
+        <p:spPr>
+          <a:xfrm>
+            <a:off x="9972261" y="6381750"/>
+            <a:ext cx="2133600" cy="365125"/>
+          </a:xfrm>
+        </p:spPr>
+        <p:txBody>
+          <a:bodyPr/>
+          <a:lstStyle/>
+          <a:p>
+            <a:pPr marL="0" lvl="0" indent="0" algn="r" rtl="0">
+              <a:spcBef>
+                <a:spcPts val="0"/>
+              </a:spcBef>
+              <a:spcAft>
+                <a:spcPts val="0"/>
+              </a:spcAft>
+              <a:buNone/>
+            </a:pPr>
+            <a:fld id="{00000000-1234-1234-1234-123412341234}" type="slidenum">
+              <a:rPr lang="en-US" smtClean="0"/>
+              <a:t>6</a:t>
+            </a:fld>
+            <a:endParaRPr lang="en-US" dirty="0"/>
           </a:p>
         </p:txBody>
       </p:sp>
@@ -32115,6 +36433,49 @@
           </a:prstGeom>
         </p:spPr>
       </p:pic>
+      <p:sp>
+        <p:nvSpPr>
+          <p:cNvPr id="4" name="מציין מיקום של מספר שקופית 3">
+            <a:extLst>
+              <a:ext uri="{FF2B5EF4-FFF2-40B4-BE49-F238E27FC236}">
+                <a16:creationId xmlns:a16="http://schemas.microsoft.com/office/drawing/2014/main" id="{57731A1F-CC8C-4A4C-3344-3E0857E4706F}"/>
+              </a:ext>
+            </a:extLst>
+          </p:cNvPr>
+          <p:cNvSpPr>
+            <a:spLocks noGrp="1"/>
+          </p:cNvSpPr>
+          <p:nvPr>
+            <p:ph type="sldNum" idx="12"/>
+          </p:nvPr>
+        </p:nvSpPr>
+        <p:spPr>
+          <a:xfrm>
+            <a:off x="9956138" y="6381750"/>
+            <a:ext cx="2133600" cy="365125"/>
+          </a:xfrm>
+        </p:spPr>
+        <p:txBody>
+          <a:bodyPr/>
+          <a:lstStyle/>
+          <a:p>
+            <a:pPr marL="0" lvl="0" indent="0" algn="r" rtl="0">
+              <a:spcBef>
+                <a:spcPts val="0"/>
+              </a:spcBef>
+              <a:spcAft>
+                <a:spcPts val="0"/>
+              </a:spcAft>
+              <a:buNone/>
+            </a:pPr>
+            <a:fld id="{00000000-1234-1234-1234-123412341234}" type="slidenum">
+              <a:rPr lang="en-US" smtClean="0"/>
+              <a:t>7</a:t>
+            </a:fld>
+            <a:endParaRPr lang="en-US" dirty="0"/>
+          </a:p>
+        </p:txBody>
+      </p:sp>
     </p:spTree>
   </p:cSld>
   <p:clrMapOvr>
@@ -32819,6 +37180,49 @@
           </a:ln>
         </p:spPr>
       </p:pic>
+      <p:sp>
+        <p:nvSpPr>
+          <p:cNvPr id="3" name="מציין מיקום של מספר שקופית 2">
+            <a:extLst>
+              <a:ext uri="{FF2B5EF4-FFF2-40B4-BE49-F238E27FC236}">
+                <a16:creationId xmlns:a16="http://schemas.microsoft.com/office/drawing/2014/main" id="{CFE67095-9F0B-3D15-2F82-CBB721B1D93A}"/>
+              </a:ext>
+            </a:extLst>
+          </p:cNvPr>
+          <p:cNvSpPr>
+            <a:spLocks noGrp="1"/>
+          </p:cNvSpPr>
+          <p:nvPr>
+            <p:ph type="sldNum" idx="12"/>
+          </p:nvPr>
+        </p:nvSpPr>
+        <p:spPr>
+          <a:xfrm>
+            <a:off x="9977940" y="6404916"/>
+            <a:ext cx="2133600" cy="365125"/>
+          </a:xfrm>
+        </p:spPr>
+        <p:txBody>
+          <a:bodyPr/>
+          <a:lstStyle/>
+          <a:p>
+            <a:pPr marL="0" lvl="0" indent="0" algn="r" rtl="0">
+              <a:spcBef>
+                <a:spcPts val="0"/>
+              </a:spcBef>
+              <a:spcAft>
+                <a:spcPts val="0"/>
+              </a:spcAft>
+              <a:buNone/>
+            </a:pPr>
+            <a:fld id="{00000000-1234-1234-1234-123412341234}" type="slidenum">
+              <a:rPr lang="en-US" smtClean="0"/>
+              <a:t>8</a:t>
+            </a:fld>
+            <a:endParaRPr lang="en-US" dirty="0"/>
+          </a:p>
+        </p:txBody>
+      </p:sp>
     </p:spTree>
   </p:cSld>
   <p:clrMapOvr>
@@ -33371,6 +37775,49 @@
               <a:t>אם זה נראה כמו רשימה ומתנהג כמו רשימה - זו רשימה. פקודות מנסות לפרש כל מחרוזת לפי המבנה המבוקש.</a:t>
             </a:r>
             <a:endParaRPr lang="he-IL" sz="1600" noProof="0" dirty="0"/>
+          </a:p>
+        </p:txBody>
+      </p:sp>
+      <p:sp>
+        <p:nvSpPr>
+          <p:cNvPr id="3" name="מציין מיקום של מספר שקופית 2">
+            <a:extLst>
+              <a:ext uri="{FF2B5EF4-FFF2-40B4-BE49-F238E27FC236}">
+                <a16:creationId xmlns:a16="http://schemas.microsoft.com/office/drawing/2014/main" id="{8250F157-8D9F-9C92-9D8F-25FA746A0318}"/>
+              </a:ext>
+            </a:extLst>
+          </p:cNvPr>
+          <p:cNvSpPr>
+            <a:spLocks noGrp="1"/>
+          </p:cNvSpPr>
+          <p:nvPr>
+            <p:ph type="sldNum" idx="12"/>
+          </p:nvPr>
+        </p:nvSpPr>
+        <p:spPr>
+          <a:xfrm>
+            <a:off x="9977940" y="6381750"/>
+            <a:ext cx="2133600" cy="365125"/>
+          </a:xfrm>
+        </p:spPr>
+        <p:txBody>
+          <a:bodyPr/>
+          <a:lstStyle/>
+          <a:p>
+            <a:pPr marL="0" lvl="0" indent="0" algn="r" rtl="0">
+              <a:spcBef>
+                <a:spcPts val="0"/>
+              </a:spcBef>
+              <a:spcAft>
+                <a:spcPts val="0"/>
+              </a:spcAft>
+              <a:buNone/>
+            </a:pPr>
+            <a:fld id="{00000000-1234-1234-1234-123412341234}" type="slidenum">
+              <a:rPr lang="en-US" smtClean="0"/>
+              <a:t>9</a:t>
+            </a:fld>
+            <a:endParaRPr lang="en-US" dirty="0"/>
           </a:p>
         </p:txBody>
       </p:sp>

--- a/מצגת מעודכנת TCL.pptx
+++ b/מצגת מעודכנת TCL.pptx
@@ -13194,10 +13194,10 @@
               <a:buNone/>
             </a:pPr>
             <a:fld id="{00000000-1234-1234-1234-123412341234}" type="slidenum">
-              <a:rPr lang="en-US" smtClean="0"/>
+              <a:rPr lang="en-US" sz="2000" smtClean="0"/>
               <a:t>1</a:t>
             </a:fld>
-            <a:endParaRPr lang="en-US" dirty="0"/>
+            <a:endParaRPr lang="en-US" sz="2000" dirty="0"/>
           </a:p>
         </p:txBody>
       </p:sp>
@@ -13815,10 +13815,10 @@
               <a:buNone/>
             </a:pPr>
             <a:fld id="{00000000-1234-1234-1234-123412341234}" type="slidenum">
-              <a:rPr lang="en-US" smtClean="0"/>
+              <a:rPr lang="en-US" sz="2000" smtClean="0"/>
               <a:t>10</a:t>
             </a:fld>
-            <a:endParaRPr lang="en-US" dirty="0"/>
+            <a:endParaRPr lang="en-US" sz="2000" dirty="0"/>
           </a:p>
         </p:txBody>
       </p:sp>
@@ -14662,10 +14662,10 @@
               <a:buNone/>
             </a:pPr>
             <a:fld id="{00000000-1234-1234-1234-123412341234}" type="slidenum">
-              <a:rPr lang="en-US" smtClean="0"/>
+              <a:rPr lang="en-US" sz="2000" smtClean="0"/>
               <a:t>11</a:t>
             </a:fld>
-            <a:endParaRPr lang="en-US" dirty="0"/>
+            <a:endParaRPr lang="en-US" sz="2000" dirty="0"/>
           </a:p>
         </p:txBody>
       </p:sp>
@@ -15339,10 +15339,10 @@
               <a:buNone/>
             </a:pPr>
             <a:fld id="{00000000-1234-1234-1234-123412341234}" type="slidenum">
-              <a:rPr lang="en-US" smtClean="0"/>
+              <a:rPr lang="en-US" sz="2000" smtClean="0"/>
               <a:t>12</a:t>
             </a:fld>
-            <a:endParaRPr lang="en-US" dirty="0"/>
+            <a:endParaRPr lang="en-US" sz="2000" dirty="0"/>
           </a:p>
         </p:txBody>
       </p:sp>
@@ -16082,7 +16082,7 @@
               <a:buNone/>
             </a:pPr>
             <a:fld id="{00000000-1234-1234-1234-123412341234}" type="slidenum">
-              <a:rPr lang="en-US" smtClean="0"/>
+              <a:rPr lang="en-US" sz="2000" smtClean="0"/>
               <a:t>13</a:t>
             </a:fld>
             <a:endParaRPr lang="en-US" dirty="0"/>
@@ -16142,7 +16142,7 @@
         </p:blipFill>
         <p:spPr>
           <a:xfrm>
-            <a:off x="0" y="0"/>
+            <a:off x="-454325" y="0"/>
             <a:ext cx="12192000" cy="6858000"/>
           </a:xfrm>
           <a:prstGeom prst="rect">
@@ -18006,7 +18006,7 @@
           <p:spPr>
             <a:xfrm>
               <a:off x="8953500" y="4953000"/>
-              <a:ext cx="2381400" cy="762000"/>
+              <a:ext cx="2609850" cy="762000"/>
             </a:xfrm>
             <a:prstGeom prst="rect">
               <a:avLst/>
@@ -18337,11 +18337,11 @@
           <a:p>
             <a:pPr algn="r"/>
             <a:fld id="{00000000-1234-1234-1234-123412341234}" type="slidenum">
-              <a:rPr lang="en-US" smtClean="0"/>
+              <a:rPr lang="en-US" sz="1800" smtClean="0"/>
               <a:pPr algn="r"/>
               <a:t>14</a:t>
             </a:fld>
-            <a:endParaRPr lang="en-US" dirty="0"/>
+            <a:endParaRPr lang="en-US" sz="1800" dirty="0"/>
           </a:p>
         </p:txBody>
       </p:sp>
@@ -19174,7 +19174,7 @@
           </a:lstStyle>
           <a:p>
             <a:fld id="{00000000-1234-1234-1234-123412341234}" type="slidenum">
-              <a:rPr lang="en-US" smtClean="0"/>
+              <a:rPr lang="en-US" sz="2000" smtClean="0"/>
               <a:pPr/>
               <a:t>15</a:t>
             </a:fld>
@@ -21138,11 +21138,11 @@
           </a:lstStyle>
           <a:p>
             <a:fld id="{00000000-1234-1234-1234-123412341234}" type="slidenum">
-              <a:rPr lang="en-US" smtClean="0"/>
+              <a:rPr lang="en-US" sz="2000" smtClean="0"/>
               <a:pPr/>
               <a:t>16</a:t>
             </a:fld>
-            <a:endParaRPr lang="en-US" dirty="0"/>
+            <a:endParaRPr lang="en-US" sz="2000" dirty="0"/>
           </a:p>
         </p:txBody>
       </p:sp>
@@ -22218,7 +22218,7 @@
           </a:lstStyle>
           <a:p>
             <a:fld id="{00000000-1234-1234-1234-123412341234}" type="slidenum">
-              <a:rPr lang="en-US" smtClean="0"/>
+              <a:rPr lang="en-US" sz="2000" smtClean="0"/>
               <a:pPr/>
               <a:t>17</a:t>
             </a:fld>
@@ -23166,7 +23166,7 @@
           </a:lstStyle>
           <a:p>
             <a:fld id="{00000000-1234-1234-1234-123412341234}" type="slidenum">
-              <a:rPr lang="en-US" smtClean="0"/>
+              <a:rPr lang="en-US" sz="2000" smtClean="0"/>
               <a:pPr/>
               <a:t>18</a:t>
             </a:fld>
@@ -24043,7 +24043,7 @@
           </a:lstStyle>
           <a:p>
             <a:fld id="{00000000-1234-1234-1234-123412341234}" type="slidenum">
-              <a:rPr lang="en-US" smtClean="0"/>
+              <a:rPr lang="en-US" sz="2000" smtClean="0"/>
               <a:pPr/>
               <a:t>19</a:t>
             </a:fld>
@@ -24860,10 +24860,10 @@
               <a:buNone/>
             </a:pPr>
             <a:fld id="{00000000-1234-1234-1234-123412341234}" type="slidenum">
-              <a:rPr lang="en-US" smtClean="0"/>
+              <a:rPr lang="en-US" sz="2000" smtClean="0"/>
               <a:t>2</a:t>
             </a:fld>
-            <a:endParaRPr lang="en-US" dirty="0"/>
+            <a:endParaRPr lang="en-US" sz="2000" dirty="0"/>
           </a:p>
         </p:txBody>
       </p:sp>
@@ -26205,11 +26205,11 @@
           </a:lstStyle>
           <a:p>
             <a:fld id="{00000000-1234-1234-1234-123412341234}" type="slidenum">
-              <a:rPr lang="en-US" smtClean="0"/>
+              <a:rPr lang="en-US" sz="2000" smtClean="0"/>
               <a:pPr/>
               <a:t>21</a:t>
             </a:fld>
-            <a:endParaRPr lang="en-US" dirty="0"/>
+            <a:endParaRPr lang="en-US" sz="2000" dirty="0"/>
           </a:p>
         </p:txBody>
       </p:sp>
@@ -27202,7 +27202,7 @@
           </a:lstStyle>
           <a:p>
             <a:fld id="{00000000-1234-1234-1234-123412341234}" type="slidenum">
-              <a:rPr lang="en-US" smtClean="0"/>
+              <a:rPr lang="en-US" sz="2000" smtClean="0"/>
               <a:pPr/>
               <a:t>22</a:t>
             </a:fld>
@@ -28092,7 +28092,7 @@
           </a:lstStyle>
           <a:p>
             <a:fld id="{00000000-1234-1234-1234-123412341234}" type="slidenum">
-              <a:rPr lang="en-US" smtClean="0"/>
+              <a:rPr lang="en-US" sz="2000" smtClean="0"/>
               <a:pPr/>
               <a:t>23</a:t>
             </a:fld>
@@ -29045,11 +29045,11 @@
           </a:lstStyle>
           <a:p>
             <a:fld id="{00000000-1234-1234-1234-123412341234}" type="slidenum">
-              <a:rPr lang="en-US" smtClean="0"/>
+              <a:rPr lang="en-US" sz="2000" smtClean="0"/>
               <a:pPr/>
               <a:t>24</a:t>
             </a:fld>
-            <a:endParaRPr lang="en-US" dirty="0"/>
+            <a:endParaRPr lang="en-US" sz="2000" dirty="0"/>
           </a:p>
         </p:txBody>
       </p:sp>
@@ -30006,7 +30006,7 @@
           </a:lstStyle>
           <a:p>
             <a:fld id="{00000000-1234-1234-1234-123412341234}" type="slidenum">
-              <a:rPr lang="en-US" smtClean="0"/>
+              <a:rPr lang="en-US" sz="2000" smtClean="0"/>
               <a:pPr/>
               <a:t>25</a:t>
             </a:fld>
@@ -30984,7 +30984,7 @@
           <a:p>
             <a:pPr algn="r"/>
             <a:fld id="{00000000-1234-1234-1234-123412341234}" type="slidenum">
-              <a:rPr lang="en-US" smtClean="0"/>
+              <a:rPr lang="en-US" sz="1800" smtClean="0"/>
               <a:pPr algn="r"/>
               <a:t>26</a:t>
             </a:fld>
@@ -31249,40 +31249,6 @@
               <a:buNone/>
             </a:pPr>
             <a:endParaRPr lang="he-IL" noProof="0" dirty="0"/>
-          </a:p>
-        </p:txBody>
-      </p:sp>
-      <p:sp>
-        <p:nvSpPr>
-          <p:cNvPr id="3" name="מציין מיקום של מספר שקופית 2">
-            <a:extLst>
-              <a:ext uri="{FF2B5EF4-FFF2-40B4-BE49-F238E27FC236}">
-                <a16:creationId xmlns:a16="http://schemas.microsoft.com/office/drawing/2014/main" id="{E0662C80-FF9B-C7EE-6F5F-847A97CADDC6}"/>
-              </a:ext>
-            </a:extLst>
-          </p:cNvPr>
-          <p:cNvSpPr>
-            <a:spLocks noGrp="1"/>
-          </p:cNvSpPr>
-          <p:nvPr>
-            <p:ph type="sldNum" idx="12"/>
-          </p:nvPr>
-        </p:nvSpPr>
-        <p:spPr/>
-        <p:txBody>
-          <a:bodyPr/>
-          <a:lstStyle/>
-          <a:p>
-            <a:pPr marL="0" lvl="0" indent="0" algn="r" rtl="0">
-              <a:spcBef>
-                <a:spcPts val="0"/>
-              </a:spcBef>
-              <a:spcAft>
-                <a:spcPts val="0"/>
-              </a:spcAft>
-              <a:buNone/>
-            </a:pPr>
-            <a:endParaRPr lang="en-US" dirty="0"/>
           </a:p>
         </p:txBody>
       </p:sp>
@@ -31661,7 +31627,7 @@
               <a:buNone/>
             </a:pPr>
             <a:r>
-              <a:rPr lang="he-IL" sz="3300" b="1" i="0" u="none" strike="noStrike" cap="none" noProof="0" dirty="0" err="1">
+              <a:rPr lang="he-IL" sz="3300" b="1" i="0" u="none" strike="noStrike" cap="none" noProof="0" dirty="0">
                 <a:solidFill>
                   <a:srgbClr val="003366"/>
                 </a:solidFill>
@@ -31670,7 +31636,7 @@
                 <a:cs typeface="Heebo"/>
                 <a:sym typeface="Heebo"/>
               </a:rPr>
-              <a:t>Sources</a:t>
+              <a:t>מקורות</a:t>
             </a:r>
             <a:endParaRPr lang="he-IL" noProof="0" dirty="0"/>
           </a:p>
@@ -32333,7 +32299,7 @@
         </p:blipFill>
         <p:spPr>
           <a:xfrm>
-            <a:off x="0" y="0"/>
+            <a:off x="0" y="5751"/>
             <a:ext cx="12192000" cy="6858000"/>
           </a:xfrm>
           <a:prstGeom prst="rect">
@@ -32360,7 +32326,7 @@
         </p:blipFill>
         <p:spPr>
           <a:xfrm>
-            <a:off x="8127950" y="2488108"/>
+            <a:off x="8195787" y="2485429"/>
             <a:ext cx="3492549" cy="2881907"/>
           </a:xfrm>
           <a:prstGeom prst="rect">
@@ -32532,7 +32498,7 @@
         </p:nvSpPr>
         <p:spPr>
           <a:xfrm>
-            <a:off x="8350675" y="3573958"/>
+            <a:off x="8350675" y="3512642"/>
             <a:ext cx="3047099" cy="352425"/>
           </a:xfrm>
           <a:prstGeom prst="rect">
@@ -32606,7 +32572,7 @@
         </p:nvSpPr>
         <p:spPr>
           <a:xfrm>
-            <a:off x="8423225" y="4069248"/>
+            <a:off x="8423225" y="4007932"/>
             <a:ext cx="2901900" cy="1329595"/>
           </a:xfrm>
           <a:prstGeom prst="rect">
@@ -32885,7 +32851,7 @@
         <p:spPr>
           <a:xfrm>
             <a:off x="866626" y="4069258"/>
-            <a:ext cx="2901900" cy="886397"/>
+            <a:ext cx="2901900" cy="1329595"/>
           </a:xfrm>
           <a:prstGeom prst="rect">
             <a:avLst/>
@@ -32923,7 +32889,31 @@
                 <a:cs typeface="Assistant"/>
                 <a:sym typeface="Assistant"/>
               </a:rPr>
-              <a:t>פתרון בעיות בתעשיית השבבים (EDA) והתקשורת (</a:t>
+              <a:t>פתרון בעיות בתעשיית השבבים (EDA) </a:t>
+            </a:r>
+            <a:r>
+              <a:rPr lang="he-IL" sz="1800" b="0" i="0" u="none" strike="noStrike" cap="none" noProof="0" dirty="0" err="1">
+                <a:solidFill>
+                  <a:srgbClr val="2C3E50"/>
+                </a:solidFill>
+                <a:latin typeface="Assistant"/>
+                <a:ea typeface="Assistant"/>
+                <a:cs typeface="Assistant"/>
+                <a:sym typeface="Assistant"/>
+              </a:rPr>
+              <a:t>ואטומציה</a:t>
+            </a:r>
+            <a:r>
+              <a:rPr lang="he-IL" sz="1800" b="0" i="0" u="none" strike="noStrike" cap="none" noProof="0" dirty="0">
+                <a:solidFill>
+                  <a:srgbClr val="2C3E50"/>
+                </a:solidFill>
+                <a:latin typeface="Assistant"/>
+                <a:ea typeface="Assistant"/>
+                <a:cs typeface="Assistant"/>
+                <a:sym typeface="Assistant"/>
+              </a:rPr>
+              <a:t> בתקשורת (</a:t>
             </a:r>
             <a:r>
               <a:rPr lang="he-IL" sz="1800" b="0" i="0" u="none" strike="noStrike" cap="none" noProof="0" dirty="0" err="1">
@@ -32968,7 +32958,7 @@
         </p:blipFill>
         <p:spPr>
           <a:xfrm>
-            <a:off x="9645550" y="2850058"/>
+            <a:off x="9645550" y="2788742"/>
             <a:ext cx="457200" cy="457200"/>
           </a:xfrm>
           <a:prstGeom prst="rect">
@@ -32995,7 +32985,7 @@
         </p:blipFill>
         <p:spPr>
           <a:xfrm>
-            <a:off x="5838676" y="2850058"/>
+            <a:off x="5838676" y="2788742"/>
             <a:ext cx="514350" cy="457200"/>
           </a:xfrm>
           <a:prstGeom prst="rect">
@@ -33070,10 +33060,10 @@
               <a:buNone/>
             </a:pPr>
             <a:fld id="{00000000-1234-1234-1234-123412341234}" type="slidenum">
-              <a:rPr lang="en-US" smtClean="0"/>
+              <a:rPr lang="en-US" sz="2000" smtClean="0"/>
               <a:t>3</a:t>
             </a:fld>
-            <a:endParaRPr lang="en-US" dirty="0"/>
+            <a:endParaRPr lang="en-US" sz="2000" dirty="0"/>
           </a:p>
         </p:txBody>
       </p:sp>
@@ -33567,10 +33557,10 @@
               <a:buNone/>
             </a:pPr>
             <a:fld id="{00000000-1234-1234-1234-123412341234}" type="slidenum">
-              <a:rPr lang="en-US" smtClean="0"/>
+              <a:rPr lang="en-US" sz="2000" smtClean="0"/>
               <a:t>4</a:t>
             </a:fld>
-            <a:endParaRPr lang="en-US" dirty="0"/>
+            <a:endParaRPr lang="en-US" sz="2000" dirty="0"/>
           </a:p>
         </p:txBody>
       </p:sp>
@@ -34502,11 +34492,11 @@
           <a:p>
             <a:pPr algn="r"/>
             <a:fld id="{00000000-1234-1234-1234-123412341234}" type="slidenum">
-              <a:rPr lang="en-US" smtClean="0"/>
+              <a:rPr lang="en-US" sz="1800" smtClean="0"/>
               <a:pPr algn="r"/>
               <a:t>5</a:t>
             </a:fld>
-            <a:endParaRPr lang="en-US" dirty="0"/>
+            <a:endParaRPr lang="en-US" sz="1800" dirty="0"/>
           </a:p>
         </p:txBody>
       </p:sp>
@@ -35211,10 +35201,10 @@
               <a:buNone/>
             </a:pPr>
             <a:fld id="{00000000-1234-1234-1234-123412341234}" type="slidenum">
-              <a:rPr lang="en-US" smtClean="0"/>
+              <a:rPr lang="en-US" sz="2000" smtClean="0"/>
               <a:t>6</a:t>
             </a:fld>
-            <a:endParaRPr lang="en-US" dirty="0"/>
+            <a:endParaRPr lang="en-US" sz="2000" dirty="0"/>
           </a:p>
         </p:txBody>
       </p:sp>
@@ -36469,10 +36459,10 @@
               <a:buNone/>
             </a:pPr>
             <a:fld id="{00000000-1234-1234-1234-123412341234}" type="slidenum">
-              <a:rPr lang="en-US" smtClean="0"/>
+              <a:rPr lang="en-US" sz="2000" smtClean="0"/>
               <a:t>7</a:t>
             </a:fld>
-            <a:endParaRPr lang="en-US" dirty="0"/>
+            <a:endParaRPr lang="en-US" sz="2000" dirty="0"/>
           </a:p>
         </p:txBody>
       </p:sp>
@@ -37216,10 +37206,10 @@
               <a:buNone/>
             </a:pPr>
             <a:fld id="{00000000-1234-1234-1234-123412341234}" type="slidenum">
-              <a:rPr lang="en-US" smtClean="0"/>
+              <a:rPr lang="en-US" sz="2000" smtClean="0"/>
               <a:t>8</a:t>
             </a:fld>
-            <a:endParaRPr lang="en-US" dirty="0"/>
+            <a:endParaRPr lang="en-US" sz="2000" dirty="0"/>
           </a:p>
         </p:txBody>
       </p:sp>
@@ -37814,10 +37804,10 @@
               <a:buNone/>
             </a:pPr>
             <a:fld id="{00000000-1234-1234-1234-123412341234}" type="slidenum">
-              <a:rPr lang="en-US" smtClean="0"/>
+              <a:rPr lang="en-US" sz="2000" smtClean="0"/>
               <a:t>9</a:t>
             </a:fld>
-            <a:endParaRPr lang="en-US" dirty="0"/>
+            <a:endParaRPr lang="en-US" sz="2000" dirty="0"/>
           </a:p>
         </p:txBody>
       </p:sp>
